--- a/output/wordlabs-predict-3day.pptx
+++ b/output/wordlabs-predict-3day.pptx
@@ -4240,7 +4240,7 @@
                 <a:ea typeface="Calibri" pitchFamily="34" charset="-122"/>
                 <a:cs typeface="Calibri" pitchFamily="34" charset="-120"/>
               </a:rPr>
-              <a:t>"to say before it happens"</a:t>
+              <a:t>"say what will happen"</a:t>
             </a:r>
             <a:endParaRPr lang="en-US" sz="2200" dirty="0"/>
           </a:p>
@@ -5288,7 +5288,7 @@
                 <a:ea typeface="Calibri" pitchFamily="34" charset="-122"/>
                 <a:cs typeface="Calibri" pitchFamily="34" charset="-120"/>
               </a:rPr>
-              <a:t>Word Labs  •  wordlabs.app  •  Root: 'predict' = to say before it happens</a:t>
+              <a:t>Word Labs  •  wordlabs.app  •  Root: 'predict' = say what will happen</a:t>
             </a:r>
             <a:endParaRPr lang="en-US" sz="800" dirty="0"/>
           </a:p>
@@ -5928,7 +5928,7 @@
                 <a:ea typeface="Calibri" pitchFamily="34" charset="-122"/>
                 <a:cs typeface="Calibri" pitchFamily="34" charset="-120"/>
               </a:rPr>
-              <a:t>Word Labs  •  wordlabs.app  •  Root: 'predict' = to say before it happens</a:t>
+              <a:t>Word Labs  •  wordlabs.app  •  Root: 'predict' = say what will happen</a:t>
             </a:r>
             <a:endParaRPr lang="en-US" sz="800" dirty="0"/>
           </a:p>
@@ -6071,7 +6071,7 @@
                 <a:ea typeface="Calibri" pitchFamily="34" charset="-122"/>
                 <a:cs typeface="Calibri" pitchFamily="34" charset="-120"/>
               </a:rPr>
-              <a:t> about what will happen, or is the result too </a:t>
+              <a:t> about the experiment, or is the result too </a:t>
             </a:r>
             <a:pPr algn="l" indent="0" marL="0">
               <a:buNone/>
@@ -6716,7 +6716,7 @@
                 <a:ea typeface="Calibri" pitchFamily="34" charset="-122"/>
                 <a:cs typeface="Calibri" pitchFamily="34" charset="-120"/>
               </a:rPr>
-              <a:t>Word Labs  •  wordlabs.app  •  Root: 'predict' = to say before it happens</a:t>
+              <a:t>Word Labs  •  wordlabs.app  •  Root: 'predict' = say what will happen</a:t>
             </a:r>
             <a:endParaRPr lang="en-US" sz="800" dirty="0"/>
           </a:p>
@@ -7543,7 +7543,7 @@
                 <a:ea typeface="Calibri" pitchFamily="34" charset="-122"/>
                 <a:cs typeface="Calibri" pitchFamily="34" charset="-120"/>
               </a:rPr>
-              <a:t>Word Labs  •  wordlabs.app  •  Root: 'predict' = to say before it happens</a:t>
+              <a:t>Word Labs  •  wordlabs.app  •  Root: 'predict' = say what will happen</a:t>
             </a:r>
             <a:endParaRPr lang="en-US" sz="800" dirty="0"/>
           </a:p>
@@ -7860,7 +7860,7 @@
                 <a:ea typeface="Calibri" pitchFamily="34" charset="-122"/>
                 <a:cs typeface="Calibri" pitchFamily="34" charset="-120"/>
               </a:rPr>
-              <a:t>to say before it happens</a:t>
+              <a:t>say what will happen</a:t>
             </a:r>
             <a:endParaRPr lang="en-US" sz="850" dirty="0"/>
           </a:p>
@@ -8528,7 +8528,7 @@
                 <a:ea typeface="Calibri" pitchFamily="34" charset="-122"/>
                 <a:cs typeface="Calibri" pitchFamily="34" charset="-120"/>
               </a:rPr>
-              <a:t>Word Labs  •  wordlabs.app  •  Root: 'predict' = to say before it happens</a:t>
+              <a:t>Word Labs  •  wordlabs.app  •  Root: 'predict' = say what will happen</a:t>
             </a:r>
             <a:endParaRPr lang="en-US" sz="800" dirty="0"/>
           </a:p>
@@ -8845,7 +8845,7 @@
                 <a:ea typeface="Calibri" pitchFamily="34" charset="-122"/>
                 <a:cs typeface="Calibri" pitchFamily="34" charset="-120"/>
               </a:rPr>
-              <a:t>to say before it happens</a:t>
+              <a:t>say what will happen</a:t>
             </a:r>
             <a:endParaRPr lang="en-US" sz="850" dirty="0"/>
           </a:p>
@@ -9750,7 +9750,7 @@
                 <a:ea typeface="Calibri" pitchFamily="34" charset="-122"/>
                 <a:cs typeface="Calibri" pitchFamily="34" charset="-120"/>
               </a:rPr>
-              <a:t>Word Labs  •  wordlabs.app  •  Root: 'predict' = to say before it happens</a:t>
+              <a:t>Word Labs  •  wordlabs.app  •  Root: 'predict' = say what will happen</a:t>
             </a:r>
             <a:endParaRPr lang="en-US" sz="800" dirty="0"/>
           </a:p>
@@ -10067,7 +10067,7 @@
                 <a:ea typeface="Calibri" pitchFamily="34" charset="-122"/>
                 <a:cs typeface="Calibri" pitchFamily="34" charset="-120"/>
               </a:rPr>
-              <a:t>to say before it happens</a:t>
+              <a:t>say what will happen</a:t>
             </a:r>
             <a:endParaRPr lang="en-US" sz="850" dirty="0"/>
           </a:p>
@@ -11605,7 +11605,7 @@
                 <a:ea typeface="Calibri" pitchFamily="34" charset="-122"/>
                 <a:cs typeface="Calibri" pitchFamily="34" charset="-120"/>
               </a:rPr>
-              <a:t>Word Labs  •  wordlabs.app  •  Root: 'predict' = to say before it happens</a:t>
+              <a:t>Word Labs  •  wordlabs.app  •  Root: 'predict' = say what will happen</a:t>
             </a:r>
             <a:endParaRPr lang="en-US" sz="800" dirty="0"/>
           </a:p>
@@ -12432,7 +12432,7 @@
                 <a:ea typeface="Calibri" pitchFamily="34" charset="-122"/>
                 <a:cs typeface="Calibri" pitchFamily="34" charset="-120"/>
               </a:rPr>
-              <a:t>Word Labs  •  wordlabs.app  •  Root: 'predict' = to say before it happens</a:t>
+              <a:t>Word Labs  •  wordlabs.app  •  Root: 'predict' = say what will happen</a:t>
             </a:r>
             <a:endParaRPr lang="en-US" sz="800" dirty="0"/>
           </a:p>
@@ -12861,7 +12861,7 @@
                 <a:ea typeface="Calibri" pitchFamily="34" charset="-122"/>
                 <a:cs typeface="Calibri" pitchFamily="34" charset="-120"/>
               </a:rPr>
-              <a:t>to say before it happens</a:t>
+              <a:t>say what will happen</a:t>
             </a:r>
             <a:endParaRPr lang="en-US" sz="850" dirty="0"/>
           </a:p>
@@ -13529,7 +13529,7 @@
                 <a:ea typeface="Calibri" pitchFamily="34" charset="-122"/>
                 <a:cs typeface="Calibri" pitchFamily="34" charset="-120"/>
               </a:rPr>
-              <a:t>Word Labs  •  wordlabs.app  •  Root: 'predict' = to say before it happens</a:t>
+              <a:t>Word Labs  •  wordlabs.app  •  Root: 'predict' = say what will happen</a:t>
             </a:r>
             <a:endParaRPr lang="en-US" sz="800" dirty="0"/>
           </a:p>
@@ -13958,7 +13958,7 @@
                 <a:ea typeface="Calibri" pitchFamily="34" charset="-122"/>
                 <a:cs typeface="Calibri" pitchFamily="34" charset="-120"/>
               </a:rPr>
-              <a:t>to say before it happens</a:t>
+              <a:t>say what will happen</a:t>
             </a:r>
             <a:endParaRPr lang="en-US" sz="850" dirty="0"/>
           </a:p>
@@ -14982,7 +14982,7 @@
                 <a:ea typeface="Calibri" pitchFamily="34" charset="-122"/>
                 <a:cs typeface="Calibri" pitchFamily="34" charset="-120"/>
               </a:rPr>
-              <a:t>Root 'predict' — to say before it happens</a:t>
+              <a:t>Root 'predict' — say what will happen</a:t>
             </a:r>
             <a:endParaRPr lang="en-US" sz="1600" dirty="0"/>
           </a:p>
@@ -15338,7 +15338,7 @@
                 <a:ea typeface="Calibri" pitchFamily="34" charset="-122"/>
                 <a:cs typeface="Calibri" pitchFamily="34" charset="-120"/>
               </a:rPr>
-              <a:t>Word Labs  •  wordlabs.app  •  Root: 'predict' = to say before it happens</a:t>
+              <a:t>Word Labs  •  wordlabs.app  •  Root: 'predict' = say what will happen</a:t>
             </a:r>
             <a:endParaRPr lang="en-US" sz="800" dirty="0"/>
           </a:p>
@@ -15767,7 +15767,7 @@
                 <a:ea typeface="Calibri" pitchFamily="34" charset="-122"/>
                 <a:cs typeface="Calibri" pitchFamily="34" charset="-120"/>
               </a:rPr>
-              <a:t>to say before it happens</a:t>
+              <a:t>say what will happen</a:t>
             </a:r>
             <a:endParaRPr lang="en-US" sz="850" dirty="0"/>
           </a:p>
@@ -17956,7 +17956,7 @@
                 <a:ea typeface="Calibri" pitchFamily="34" charset="-122"/>
                 <a:cs typeface="Calibri" pitchFamily="34" charset="-120"/>
               </a:rPr>
-              <a:t>Word Labs  •  wordlabs.app  •  Root: 'predict' = to say before it happens</a:t>
+              <a:t>Word Labs  •  wordlabs.app  •  Root: 'predict' = say what will happen</a:t>
             </a:r>
             <a:endParaRPr lang="en-US" sz="800" dirty="0"/>
           </a:p>
@@ -18290,7 +18290,7 @@
                 <a:ea typeface="Trebuchet MS" pitchFamily="34" charset="-122"/>
                 <a:cs typeface="Trebuchet MS" pitchFamily="34" charset="-120"/>
               </a:rPr>
-              <a:t>2</a:t>
+              <a:t>1</a:t>
             </a:r>
             <a:pPr algn="ctr" indent="0" marL="0">
               <a:buNone/>
@@ -18304,7 +18304,7 @@
                 <a:ea typeface="Trebuchet MS" pitchFamily="34" charset="-122"/>
                 <a:cs typeface="Trebuchet MS" pitchFamily="34" charset="-120"/>
               </a:rPr>
-              <a:t>  punctuation marks</a:t>
+              <a:t>  punctuation mark</a:t>
             </a:r>
             <a:endParaRPr lang="en-US" sz="2800" dirty="0"/>
           </a:p>
@@ -18596,7 +18596,7 @@
                 <a:ea typeface="Calibri" pitchFamily="34" charset="-122"/>
                 <a:cs typeface="Calibri" pitchFamily="34" charset="-120"/>
               </a:rPr>
-              <a:t>Word Labs  •  wordlabs.app  •  Root: 'predict' = to say before it happens</a:t>
+              <a:t>Word Labs  •  wordlabs.app  •  Root: 'predict' = say what will happen</a:t>
             </a:r>
             <a:endParaRPr lang="en-US" sz="800" dirty="0"/>
           </a:p>
@@ -18708,7 +18708,7 @@
                 <a:ea typeface="Calibri" pitchFamily="34" charset="-122"/>
                 <a:cs typeface="Calibri" pitchFamily="34" charset="-120"/>
               </a:rPr>
-              <a:t>The weather </a:t>
+              <a:t>The </a:t>
             </a:r>
             <a:pPr algn="l" indent="0" marL="0">
               <a:buNone/>
@@ -18725,7 +18725,7 @@
                 <a:ea typeface="Calibri" pitchFamily="34" charset="-122"/>
                 <a:cs typeface="Calibri" pitchFamily="34" charset="-120"/>
               </a:rPr>
-              <a:t>predictor</a:t>
+              <a:t>predicted</a:t>
             </a:r>
             <a:pPr algn="l" indent="0" marL="0">
               <a:buNone/>
@@ -18739,7 +18739,7 @@
                 <a:ea typeface="Calibri" pitchFamily="34" charset="-122"/>
                 <a:cs typeface="Calibri" pitchFamily="34" charset="-120"/>
               </a:rPr>
-              <a:t> said the storm was </a:t>
+              <a:t> storm arrived, but its </a:t>
             </a:r>
             <a:pPr algn="l" indent="0" marL="0">
               <a:buNone/>
@@ -18756,7 +18756,7 @@
                 <a:ea typeface="Calibri" pitchFamily="34" charset="-122"/>
                 <a:cs typeface="Calibri" pitchFamily="34" charset="-120"/>
               </a:rPr>
-              <a:t>unpredictable</a:t>
+              <a:t>unpredictably</a:t>
             </a:r>
             <a:pPr algn="l" indent="0" marL="0">
               <a:buNone/>
@@ -18770,7 +18770,7 @@
                 <a:ea typeface="Calibri" pitchFamily="34" charset="-122"/>
                 <a:cs typeface="Calibri" pitchFamily="34" charset="-120"/>
               </a:rPr>
-              <a:t>, but her </a:t>
+              <a:t> strong winds surprised even the most experienced </a:t>
             </a:r>
             <a:pPr algn="l" indent="0" marL="0">
               <a:buNone/>
@@ -18787,7 +18787,7 @@
                 <a:ea typeface="Calibri" pitchFamily="34" charset="-122"/>
                 <a:cs typeface="Calibri" pitchFamily="34" charset="-120"/>
               </a:rPr>
-              <a:t>prediction</a:t>
+              <a:t>predictor</a:t>
             </a:r>
             <a:pPr algn="l" indent="0" marL="0">
               <a:buNone/>
@@ -18801,7 +18801,7 @@
                 <a:ea typeface="Calibri" pitchFamily="34" charset="-122"/>
                 <a:cs typeface="Calibri" pitchFamily="34" charset="-120"/>
               </a:rPr>
-              <a:t> turned out to be exactly right!</a:t>
+              <a:t>.</a:t>
             </a:r>
             <a:endParaRPr lang="en-US" sz="1800" dirty="0"/>
           </a:p>
@@ -18956,7 +18956,7 @@
                 <a:ea typeface="Trebuchet MS" pitchFamily="34" charset="-122"/>
                 <a:cs typeface="Trebuchet MS" pitchFamily="34" charset="-120"/>
               </a:rPr>
-              <a:t>predictor</a:t>
+              <a:t>predicted</a:t>
             </a:r>
             <a:endParaRPr lang="en-US" sz="1400" dirty="0"/>
           </a:p>
@@ -19084,7 +19084,7 @@
                 <a:ea typeface="Trebuchet MS" pitchFamily="34" charset="-122"/>
                 <a:cs typeface="Trebuchet MS" pitchFamily="34" charset="-120"/>
               </a:rPr>
-              <a:t>unpredictable</a:t>
+              <a:t>unpredictably</a:t>
             </a:r>
             <a:endParaRPr lang="en-US" sz="1400" dirty="0"/>
           </a:p>
@@ -19212,7 +19212,7 @@
                 <a:ea typeface="Trebuchet MS" pitchFamily="34" charset="-122"/>
                 <a:cs typeface="Trebuchet MS" pitchFamily="34" charset="-120"/>
               </a:rPr>
-              <a:t>prediction</a:t>
+              <a:t>predictor</a:t>
             </a:r>
             <a:endParaRPr lang="en-US" sz="1400" dirty="0"/>
           </a:p>
@@ -19543,7 +19543,7 @@
                 <a:ea typeface="Calibri" pitchFamily="34" charset="-122"/>
                 <a:cs typeface="Calibri" pitchFamily="34" charset="-120"/>
               </a:rPr>
-              <a:t>Word Labs  •  wordlabs.app  •  Root: 'predict' = to say before it happens</a:t>
+              <a:t>Word Labs  •  wordlabs.app  •  Root: 'predict' = say what will happen</a:t>
             </a:r>
             <a:endParaRPr lang="en-US" sz="800" dirty="0"/>
           </a:p>
@@ -19682,7 +19682,7 @@
                 <a:ea typeface="Trebuchet MS" pitchFamily="34" charset="-122"/>
                 <a:cs typeface="Trebuchet MS" pitchFamily="34" charset="-120"/>
               </a:rPr>
-              <a:t>predictor</a:t>
+              <a:t>predicted</a:t>
             </a:r>
             <a:endParaRPr lang="en-US" sz="2800" dirty="0"/>
           </a:p>
@@ -20370,7 +20370,7 @@
                 <a:ea typeface="Calibri" pitchFamily="34" charset="-122"/>
                 <a:cs typeface="Calibri" pitchFamily="34" charset="-120"/>
               </a:rPr>
-              <a:t>Word Labs  •  wordlabs.app  •  Root: 'predict' = to say before it happens</a:t>
+              <a:t>Word Labs  •  wordlabs.app  •  Root: 'predict' = say what will happen</a:t>
             </a:r>
             <a:endParaRPr lang="en-US" sz="800" dirty="0"/>
           </a:p>
@@ -20509,7 +20509,7 @@
                 <a:ea typeface="Trebuchet MS" pitchFamily="34" charset="-122"/>
                 <a:cs typeface="Trebuchet MS" pitchFamily="34" charset="-120"/>
               </a:rPr>
-              <a:t>predictor</a:t>
+              <a:t>predicted</a:t>
             </a:r>
             <a:endParaRPr lang="en-US" sz="2800" dirty="0"/>
           </a:p>
@@ -20687,7 +20687,7 @@
                 <a:ea typeface="Calibri" pitchFamily="34" charset="-122"/>
                 <a:cs typeface="Calibri" pitchFamily="34" charset="-120"/>
               </a:rPr>
-              <a:t>to say before it happens</a:t>
+              <a:t>say what will happen</a:t>
             </a:r>
             <a:endParaRPr lang="en-US" sz="850" dirty="0"/>
           </a:p>
@@ -20760,7 +20760,7 @@
                 <a:ea typeface="Trebuchet MS" pitchFamily="34" charset="-122"/>
                 <a:cs typeface="Trebuchet MS" pitchFamily="34" charset="-120"/>
               </a:rPr>
-              <a:t>or</a:t>
+              <a:t>ed</a:t>
             </a:r>
             <a:endParaRPr lang="en-US" sz="1300" dirty="0"/>
           </a:p>
@@ -20799,7 +20799,7 @@
                 <a:ea typeface="Calibri" pitchFamily="34" charset="-122"/>
                 <a:cs typeface="Calibri" pitchFamily="34" charset="-120"/>
               </a:rPr>
-              <a:t>person or thing that does</a:t>
+              <a:t>in the past</a:t>
             </a:r>
             <a:endParaRPr lang="en-US" sz="850" dirty="0"/>
           </a:p>
@@ -21355,7 +21355,7 @@
                 <a:ea typeface="Calibri" pitchFamily="34" charset="-122"/>
                 <a:cs typeface="Calibri" pitchFamily="34" charset="-120"/>
               </a:rPr>
-              <a:t>Word Labs  •  wordlabs.app  •  Root: 'predict' = to say before it happens</a:t>
+              <a:t>Word Labs  •  wordlabs.app  •  Root: 'predict' = say what will happen</a:t>
             </a:r>
             <a:endParaRPr lang="en-US" sz="800" dirty="0"/>
           </a:p>
@@ -21494,7 +21494,7 @@
                 <a:ea typeface="Trebuchet MS" pitchFamily="34" charset="-122"/>
                 <a:cs typeface="Trebuchet MS" pitchFamily="34" charset="-120"/>
               </a:rPr>
-              <a:t>predictor</a:t>
+              <a:t>predicted</a:t>
             </a:r>
             <a:endParaRPr lang="en-US" sz="2800" dirty="0"/>
           </a:p>
@@ -21672,7 +21672,7 @@
                 <a:ea typeface="Calibri" pitchFamily="34" charset="-122"/>
                 <a:cs typeface="Calibri" pitchFamily="34" charset="-120"/>
               </a:rPr>
-              <a:t>to say before it happens</a:t>
+              <a:t>say what will happen</a:t>
             </a:r>
             <a:endParaRPr lang="en-US" sz="850" dirty="0"/>
           </a:p>
@@ -21745,7 +21745,7 @@
                 <a:ea typeface="Trebuchet MS" pitchFamily="34" charset="-122"/>
                 <a:cs typeface="Trebuchet MS" pitchFamily="34" charset="-120"/>
               </a:rPr>
-              <a:t>or</a:t>
+              <a:t>ed</a:t>
             </a:r>
             <a:endParaRPr lang="en-US" sz="1300" dirty="0"/>
           </a:p>
@@ -21784,7 +21784,7 @@
                 <a:ea typeface="Calibri" pitchFamily="34" charset="-122"/>
                 <a:cs typeface="Calibri" pitchFamily="34" charset="-120"/>
               </a:rPr>
-              <a:t>person or thing that does</a:t>
+              <a:t>in the past</a:t>
             </a:r>
             <a:endParaRPr lang="en-US" sz="850" dirty="0"/>
           </a:p>
@@ -22153,7 +22153,7 @@
                 <a:ea typeface="Trebuchet MS" pitchFamily="34" charset="-122"/>
                 <a:cs typeface="Trebuchet MS" pitchFamily="34" charset="-120"/>
               </a:rPr>
-              <a:t>tor</a:t>
+              <a:t>ted</a:t>
             </a:r>
             <a:endParaRPr lang="en-US" sz="1400" dirty="0"/>
           </a:p>
@@ -22577,7 +22577,7 @@
                 <a:ea typeface="Calibri" pitchFamily="34" charset="-122"/>
                 <a:cs typeface="Calibri" pitchFamily="34" charset="-120"/>
               </a:rPr>
-              <a:t>Word Labs  •  wordlabs.app  •  Root: 'predict' = to say before it happens</a:t>
+              <a:t>Word Labs  •  wordlabs.app  •  Root: 'predict' = say what will happen</a:t>
             </a:r>
             <a:endParaRPr lang="en-US" sz="800" dirty="0"/>
           </a:p>
@@ -22716,7 +22716,7 @@
                 <a:ea typeface="Trebuchet MS" pitchFamily="34" charset="-122"/>
                 <a:cs typeface="Trebuchet MS" pitchFamily="34" charset="-120"/>
               </a:rPr>
-              <a:t>predictor</a:t>
+              <a:t>predicted</a:t>
             </a:r>
             <a:endParaRPr lang="en-US" sz="2800" dirty="0"/>
           </a:p>
@@ -22894,7 +22894,7 @@
                 <a:ea typeface="Calibri" pitchFamily="34" charset="-122"/>
                 <a:cs typeface="Calibri" pitchFamily="34" charset="-120"/>
               </a:rPr>
-              <a:t>to say before it happens</a:t>
+              <a:t>say what will happen</a:t>
             </a:r>
             <a:endParaRPr lang="en-US" sz="850" dirty="0"/>
           </a:p>
@@ -22967,7 +22967,7 @@
                 <a:ea typeface="Trebuchet MS" pitchFamily="34" charset="-122"/>
                 <a:cs typeface="Trebuchet MS" pitchFamily="34" charset="-120"/>
               </a:rPr>
-              <a:t>or</a:t>
+              <a:t>ed</a:t>
             </a:r>
             <a:endParaRPr lang="en-US" sz="1300" dirty="0"/>
           </a:p>
@@ -23006,7 +23006,7 @@
                 <a:ea typeface="Calibri" pitchFamily="34" charset="-122"/>
                 <a:cs typeface="Calibri" pitchFamily="34" charset="-120"/>
               </a:rPr>
-              <a:t>person or thing that does</a:t>
+              <a:t>in the past</a:t>
             </a:r>
             <a:endParaRPr lang="en-US" sz="850" dirty="0"/>
           </a:p>
@@ -23375,7 +23375,7 @@
                 <a:ea typeface="Trebuchet MS" pitchFamily="34" charset="-122"/>
                 <a:cs typeface="Trebuchet MS" pitchFamily="34" charset="-120"/>
               </a:rPr>
-              <a:t>tor</a:t>
+              <a:t>ted</a:t>
             </a:r>
             <a:endParaRPr lang="en-US" sz="1400" dirty="0"/>
           </a:p>
@@ -23482,8 +23482,8 @@
         </p:nvSpPr>
         <p:spPr>
           <a:xfrm>
-            <a:off x="2023872" y="4169664"/>
-            <a:ext cx="685800" cy="384048"/>
+            <a:off x="1951330" y="4169664"/>
+            <a:ext cx="676656" cy="384048"/>
           </a:xfrm>
           <a:prstGeom prst="rect">
             <a:avLst>
@@ -23509,8 +23509,8 @@
         </p:nvSpPr>
         <p:spPr>
           <a:xfrm>
-            <a:off x="2023872" y="4169664"/>
-            <a:ext cx="685800" cy="384048"/>
+            <a:off x="1951330" y="4169664"/>
+            <a:ext cx="676656" cy="384048"/>
           </a:xfrm>
           <a:prstGeom prst="rect">
             <a:avLst/>
@@ -23548,8 +23548,8 @@
         </p:nvSpPr>
         <p:spPr>
           <a:xfrm>
-            <a:off x="2831592" y="4169664"/>
-            <a:ext cx="685800" cy="384048"/>
+            <a:off x="2677363" y="4169664"/>
+            <a:ext cx="676656" cy="384048"/>
           </a:xfrm>
           <a:prstGeom prst="rect">
             <a:avLst>
@@ -23575,8 +23575,8 @@
         </p:nvSpPr>
         <p:spPr>
           <a:xfrm>
-            <a:off x="2831592" y="4169664"/>
-            <a:ext cx="685800" cy="384048"/>
+            <a:off x="2677363" y="4169664"/>
+            <a:ext cx="676656" cy="384048"/>
           </a:xfrm>
           <a:prstGeom prst="rect">
             <a:avLst/>
@@ -23614,8 +23614,8 @@
         </p:nvSpPr>
         <p:spPr>
           <a:xfrm>
-            <a:off x="3639312" y="4169664"/>
-            <a:ext cx="685800" cy="384048"/>
+            <a:off x="3403397" y="4169664"/>
+            <a:ext cx="676656" cy="384048"/>
           </a:xfrm>
           <a:prstGeom prst="rect">
             <a:avLst>
@@ -23641,8 +23641,8 @@
         </p:nvSpPr>
         <p:spPr>
           <a:xfrm>
-            <a:off x="3639312" y="4169664"/>
-            <a:ext cx="685800" cy="384048"/>
+            <a:off x="3403397" y="4169664"/>
+            <a:ext cx="676656" cy="384048"/>
           </a:xfrm>
           <a:prstGeom prst="rect">
             <a:avLst/>
@@ -23680,8 +23680,8 @@
         </p:nvSpPr>
         <p:spPr>
           <a:xfrm>
-            <a:off x="4447032" y="4169664"/>
-            <a:ext cx="685800" cy="384048"/>
+            <a:off x="4129430" y="4169664"/>
+            <a:ext cx="676656" cy="384048"/>
           </a:xfrm>
           <a:prstGeom prst="rect">
             <a:avLst>
@@ -23707,8 +23707,8 @@
         </p:nvSpPr>
         <p:spPr>
           <a:xfrm>
-            <a:off x="4447032" y="4169664"/>
-            <a:ext cx="685800" cy="384048"/>
+            <a:off x="4129430" y="4169664"/>
+            <a:ext cx="676656" cy="384048"/>
           </a:xfrm>
           <a:prstGeom prst="rect">
             <a:avLst/>
@@ -23746,8 +23746,8 @@
         </p:nvSpPr>
         <p:spPr>
           <a:xfrm>
-            <a:off x="5254752" y="4169664"/>
-            <a:ext cx="685800" cy="384048"/>
+            <a:off x="4855464" y="4169664"/>
+            <a:ext cx="676656" cy="384048"/>
           </a:xfrm>
           <a:prstGeom prst="rect">
             <a:avLst>
@@ -23773,8 +23773,8 @@
         </p:nvSpPr>
         <p:spPr>
           <a:xfrm>
-            <a:off x="5254752" y="4169664"/>
-            <a:ext cx="685800" cy="384048"/>
+            <a:off x="4855464" y="4169664"/>
+            <a:ext cx="676656" cy="384048"/>
           </a:xfrm>
           <a:prstGeom prst="rect">
             <a:avLst/>
@@ -23812,8 +23812,8 @@
         </p:nvSpPr>
         <p:spPr>
           <a:xfrm>
-            <a:off x="6062472" y="4169664"/>
-            <a:ext cx="685800" cy="384048"/>
+            <a:off x="5581498" y="4169664"/>
+            <a:ext cx="676656" cy="384048"/>
           </a:xfrm>
           <a:prstGeom prst="rect">
             <a:avLst>
@@ -23839,8 +23839,8 @@
         </p:nvSpPr>
         <p:spPr>
           <a:xfrm>
-            <a:off x="6062472" y="4169664"/>
-            <a:ext cx="685800" cy="384048"/>
+            <a:off x="5581498" y="4169664"/>
+            <a:ext cx="676656" cy="384048"/>
           </a:xfrm>
           <a:prstGeom prst="rect">
             <a:avLst/>
@@ -23878,8 +23878,8 @@
         </p:nvSpPr>
         <p:spPr>
           <a:xfrm>
-            <a:off x="6062472" y="4572000"/>
-            <a:ext cx="685800" cy="219456"/>
+            <a:off x="5581498" y="4572000"/>
+            <a:ext cx="676656" cy="219456"/>
           </a:xfrm>
           <a:prstGeom prst="rect">
             <a:avLst/>
@@ -23917,8 +23917,8 @@
         </p:nvSpPr>
         <p:spPr>
           <a:xfrm>
-            <a:off x="6870192" y="4169664"/>
-            <a:ext cx="685800" cy="384048"/>
+            <a:off x="6307531" y="4169664"/>
+            <a:ext cx="676656" cy="384048"/>
           </a:xfrm>
           <a:prstGeom prst="rect">
             <a:avLst>
@@ -23944,8 +23944,8 @@
         </p:nvSpPr>
         <p:spPr>
           <a:xfrm>
-            <a:off x="6870192" y="4169664"/>
-            <a:ext cx="685800" cy="384048"/>
+            <a:off x="6307531" y="4169664"/>
+            <a:ext cx="676656" cy="384048"/>
           </a:xfrm>
           <a:prstGeom prst="rect">
             <a:avLst/>
@@ -23983,8 +23983,8 @@
         </p:nvSpPr>
         <p:spPr>
           <a:xfrm>
-            <a:off x="7677912" y="4169664"/>
-            <a:ext cx="685800" cy="384048"/>
+            <a:off x="7033565" y="4169664"/>
+            <a:ext cx="676656" cy="384048"/>
           </a:xfrm>
           <a:prstGeom prst="rect">
             <a:avLst>
@@ -24010,8 +24010,8 @@
         </p:nvSpPr>
         <p:spPr>
           <a:xfrm>
-            <a:off x="7677912" y="4169664"/>
-            <a:ext cx="685800" cy="384048"/>
+            <a:off x="7033565" y="4169664"/>
+            <a:ext cx="676656" cy="384048"/>
           </a:xfrm>
           <a:prstGeom prst="rect">
             <a:avLst/>
@@ -24035,7 +24035,73 @@
                 <a:ea typeface="Trebuchet MS" pitchFamily="34" charset="-122"/>
                 <a:cs typeface="Trebuchet MS" pitchFamily="34" charset="-120"/>
               </a:rPr>
-              <a:t>or</a:t>
+              <a:t>e</a:t>
+            </a:r>
+            <a:endParaRPr lang="en-US" sz="900" dirty="0"/>
+          </a:p>
+        </p:txBody>
+      </p:sp>
+      <p:sp>
+        <p:nvSpPr>
+          <p:cNvPr id="53" name="Shape 51"/>
+          <p:cNvSpPr/>
+          <p:nvPr/>
+        </p:nvSpPr>
+        <p:spPr>
+          <a:xfrm>
+            <a:off x="7759598" y="4169664"/>
+            <a:ext cx="676656" cy="384048"/>
+          </a:xfrm>
+          <a:prstGeom prst="rect">
+            <a:avLst>
+              <a:gd name="adj" fmla="val 9524"/>
+            </a:avLst>
+          </a:prstGeom>
+          <a:solidFill>
+            <a:srgbClr val="FFFFFF"/>
+          </a:solidFill>
+          <a:ln w="12700">
+            <a:solidFill>
+              <a:srgbClr val="DB2777"/>
+            </a:solidFill>
+            <a:prstDash val="solid"/>
+          </a:ln>
+        </p:spPr>
+      </p:sp>
+      <p:sp>
+        <p:nvSpPr>
+          <p:cNvPr id="54" name="Text 52"/>
+          <p:cNvSpPr/>
+          <p:nvPr/>
+        </p:nvSpPr>
+        <p:spPr>
+          <a:xfrm>
+            <a:off x="7759598" y="4169664"/>
+            <a:ext cx="676656" cy="384048"/>
+          </a:xfrm>
+          <a:prstGeom prst="rect">
+            <a:avLst/>
+          </a:prstGeom>
+          <a:noFill/>
+          <a:ln/>
+        </p:spPr>
+        <p:txBody>
+          <a:bodyPr wrap="square" lIns="0" tIns="0" rIns="0" bIns="0" rtlCol="0" anchor="ctr"/>
+          <a:lstStyle/>
+          <a:p>
+            <a:pPr algn="ctr" indent="0" marL="0">
+              <a:buNone/>
+            </a:pPr>
+            <a:r>
+              <a:rPr lang="en-US" sz="900" b="1" dirty="0">
+                <a:solidFill>
+                  <a:srgbClr val="9D174D"/>
+                </a:solidFill>
+                <a:latin typeface="Trebuchet MS" pitchFamily="34" charset="0"/>
+                <a:ea typeface="Trebuchet MS" pitchFamily="34" charset="-122"/>
+                <a:cs typeface="Trebuchet MS" pitchFamily="34" charset="-120"/>
+              </a:rPr>
+              <a:t>d</a:t>
             </a:r>
             <a:endParaRPr lang="en-US" sz="900" dirty="0"/>
           </a:p>
@@ -24327,7 +24393,7 @@
                 <a:ea typeface="Calibri" pitchFamily="34" charset="-122"/>
                 <a:cs typeface="Calibri" pitchFamily="34" charset="-120"/>
               </a:rPr>
-              <a:t>Word Labs  •  wordlabs.app  •  Root: 'predict' = to say before it happens</a:t>
+              <a:t>Word Labs  •  wordlabs.app  •  Root: 'predict' = say what will happen</a:t>
             </a:r>
             <a:endParaRPr lang="en-US" sz="800" dirty="0"/>
           </a:p>
@@ -24466,7 +24532,7 @@
                 <a:ea typeface="Trebuchet MS" pitchFamily="34" charset="-122"/>
                 <a:cs typeface="Trebuchet MS" pitchFamily="34" charset="-120"/>
               </a:rPr>
-              <a:t>unpredictable</a:t>
+              <a:t>unpredictably</a:t>
             </a:r>
             <a:endParaRPr lang="en-US" sz="2800" dirty="0"/>
           </a:p>
@@ -25154,7 +25220,7 @@
                 <a:ea typeface="Calibri" pitchFamily="34" charset="-122"/>
                 <a:cs typeface="Calibri" pitchFamily="34" charset="-120"/>
               </a:rPr>
-              <a:t>Word Labs  •  wordlabs.app  •  Root: 'predict' = to say before it happens</a:t>
+              <a:t>Word Labs  •  wordlabs.app  •  Root: 'predict' = say what will happen</a:t>
             </a:r>
             <a:endParaRPr lang="en-US" sz="800" dirty="0"/>
           </a:p>
@@ -25293,7 +25359,7 @@
                 <a:ea typeface="Trebuchet MS" pitchFamily="34" charset="-122"/>
                 <a:cs typeface="Trebuchet MS" pitchFamily="34" charset="-120"/>
               </a:rPr>
-              <a:t>unpredictable</a:t>
+              <a:t>unpredictably</a:t>
             </a:r>
             <a:endParaRPr lang="en-US" sz="2800" dirty="0"/>
           </a:p>
@@ -25373,8 +25439,8 @@
         </p:nvSpPr>
         <p:spPr>
           <a:xfrm>
-            <a:off x="2221992" y="2258568"/>
-            <a:ext cx="1828800" cy="292608"/>
+            <a:off x="1989734" y="2258568"/>
+            <a:ext cx="1581912" cy="292608"/>
           </a:xfrm>
           <a:prstGeom prst="rect">
             <a:avLst>
@@ -25407,8 +25473,8 @@
         </p:nvSpPr>
         <p:spPr>
           <a:xfrm>
-            <a:off x="2221992" y="2258568"/>
-            <a:ext cx="1828800" cy="292608"/>
+            <a:off x="1989734" y="2258568"/>
+            <a:ext cx="1581912" cy="292608"/>
           </a:xfrm>
           <a:prstGeom prst="rect">
             <a:avLst/>
@@ -25446,8 +25512,8 @@
         </p:nvSpPr>
         <p:spPr>
           <a:xfrm>
-            <a:off x="2221992" y="2569464"/>
-            <a:ext cx="1828800" cy="201168"/>
+            <a:off x="1989734" y="2569464"/>
+            <a:ext cx="1581912" cy="201168"/>
           </a:xfrm>
           <a:prstGeom prst="rect">
             <a:avLst/>
@@ -25485,8 +25551,8 @@
         </p:nvSpPr>
         <p:spPr>
           <a:xfrm>
-            <a:off x="4370832" y="2258568"/>
-            <a:ext cx="1828800" cy="292608"/>
+            <a:off x="3659429" y="2258568"/>
+            <a:ext cx="1581912" cy="292608"/>
           </a:xfrm>
           <a:prstGeom prst="rect">
             <a:avLst>
@@ -25519,8 +25585,8 @@
         </p:nvSpPr>
         <p:spPr>
           <a:xfrm>
-            <a:off x="4370832" y="2258568"/>
-            <a:ext cx="1828800" cy="292608"/>
+            <a:off x="3659429" y="2258568"/>
+            <a:ext cx="1581912" cy="292608"/>
           </a:xfrm>
           <a:prstGeom prst="rect">
             <a:avLst/>
@@ -25558,8 +25624,8 @@
         </p:nvSpPr>
         <p:spPr>
           <a:xfrm>
-            <a:off x="4370832" y="2569464"/>
-            <a:ext cx="1828800" cy="201168"/>
+            <a:off x="3659429" y="2569464"/>
+            <a:ext cx="1581912" cy="201168"/>
           </a:xfrm>
           <a:prstGeom prst="rect">
             <a:avLst/>
@@ -25583,7 +25649,7 @@
                 <a:ea typeface="Calibri" pitchFamily="34" charset="-122"/>
                 <a:cs typeface="Calibri" pitchFamily="34" charset="-120"/>
               </a:rPr>
-              <a:t>to say before it happens</a:t>
+              <a:t>say what will happen</a:t>
             </a:r>
             <a:endParaRPr lang="en-US" sz="850" dirty="0"/>
           </a:p>
@@ -25597,8 +25663,8 @@
         </p:nvSpPr>
         <p:spPr>
           <a:xfrm>
-            <a:off x="6519672" y="2258568"/>
-            <a:ext cx="1828800" cy="292608"/>
+            <a:off x="5329123" y="2258568"/>
+            <a:ext cx="1581912" cy="292608"/>
           </a:xfrm>
           <a:prstGeom prst="rect">
             <a:avLst>
@@ -25631,8 +25697,8 @@
         </p:nvSpPr>
         <p:spPr>
           <a:xfrm>
-            <a:off x="6519672" y="2258568"/>
-            <a:ext cx="1828800" cy="292608"/>
+            <a:off x="5329123" y="2258568"/>
+            <a:ext cx="1581912" cy="292608"/>
           </a:xfrm>
           <a:prstGeom prst="rect">
             <a:avLst/>
@@ -25670,8 +25736,8 @@
         </p:nvSpPr>
         <p:spPr>
           <a:xfrm>
-            <a:off x="6519672" y="2569464"/>
-            <a:ext cx="1828800" cy="201168"/>
+            <a:off x="5329123" y="2569464"/>
+            <a:ext cx="1581912" cy="201168"/>
           </a:xfrm>
           <a:prstGeom prst="rect">
             <a:avLst/>
@@ -25709,6 +25775,118 @@
         </p:nvSpPr>
         <p:spPr>
           <a:xfrm>
+            <a:off x="6998818" y="2258568"/>
+            <a:ext cx="1581912" cy="292608"/>
+          </a:xfrm>
+          <a:prstGeom prst="rect">
+            <a:avLst>
+              <a:gd name="adj" fmla="val 25000"/>
+            </a:avLst>
+          </a:prstGeom>
+          <a:solidFill>
+            <a:srgbClr val="FCE7F3"/>
+          </a:solidFill>
+          <a:ln w="19050">
+            <a:solidFill>
+              <a:srgbClr val="DB2777"/>
+            </a:solidFill>
+            <a:prstDash val="solid"/>
+          </a:ln>
+          <a:effectLst>
+            <a:outerShdw sx="100000" sy="100000" kx="0" ky="0" algn="bl" rotWithShape="0" blurRad="101600" dist="38100" dir="8100000">
+              <a:srgbClr val="000000">
+                <a:alpha val="12000"/>
+              </a:srgbClr>
+            </a:outerShdw>
+          </a:effectLst>
+        </p:spPr>
+      </p:sp>
+      <p:sp>
+        <p:nvSpPr>
+          <p:cNvPr id="26" name="Text 24"/>
+          <p:cNvSpPr/>
+          <p:nvPr/>
+        </p:nvSpPr>
+        <p:spPr>
+          <a:xfrm>
+            <a:off x="6998818" y="2258568"/>
+            <a:ext cx="1581912" cy="292608"/>
+          </a:xfrm>
+          <a:prstGeom prst="rect">
+            <a:avLst/>
+          </a:prstGeom>
+          <a:noFill/>
+          <a:ln/>
+        </p:spPr>
+        <p:txBody>
+          <a:bodyPr wrap="square" lIns="0" tIns="0" rIns="0" bIns="0" rtlCol="0" anchor="ctr"/>
+          <a:lstStyle/>
+          <a:p>
+            <a:pPr algn="ctr" indent="0" marL="0">
+              <a:buNone/>
+            </a:pPr>
+            <a:r>
+              <a:rPr lang="en-US" sz="1300" b="1" dirty="0">
+                <a:solidFill>
+                  <a:srgbClr val="9D174D"/>
+                </a:solidFill>
+                <a:latin typeface="Trebuchet MS" pitchFamily="34" charset="0"/>
+                <a:ea typeface="Trebuchet MS" pitchFamily="34" charset="-122"/>
+                <a:cs typeface="Trebuchet MS" pitchFamily="34" charset="-120"/>
+              </a:rPr>
+              <a:t>ly</a:t>
+            </a:r>
+            <a:endParaRPr lang="en-US" sz="1300" dirty="0"/>
+          </a:p>
+        </p:txBody>
+      </p:sp>
+      <p:sp>
+        <p:nvSpPr>
+          <p:cNvPr id="27" name="Text 25"/>
+          <p:cNvSpPr/>
+          <p:nvPr/>
+        </p:nvSpPr>
+        <p:spPr>
+          <a:xfrm>
+            <a:off x="6998818" y="2569464"/>
+            <a:ext cx="1581912" cy="201168"/>
+          </a:xfrm>
+          <a:prstGeom prst="rect">
+            <a:avLst/>
+          </a:prstGeom>
+          <a:noFill/>
+          <a:ln/>
+        </p:spPr>
+        <p:txBody>
+          <a:bodyPr wrap="square" lIns="0" tIns="0" rIns="0" bIns="0" rtlCol="0" anchor="t"/>
+          <a:lstStyle/>
+          <a:p>
+            <a:pPr algn="ctr" indent="0" marL="0">
+              <a:buNone/>
+            </a:pPr>
+            <a:r>
+              <a:rPr lang="en-US" sz="850" dirty="0">
+                <a:solidFill>
+                  <a:srgbClr val="475569"/>
+                </a:solidFill>
+                <a:latin typeface="Calibri" pitchFamily="34" charset="0"/>
+                <a:ea typeface="Calibri" pitchFamily="34" charset="-122"/>
+                <a:cs typeface="Calibri" pitchFamily="34" charset="-120"/>
+              </a:rPr>
+              <a:t>in a certain way</a:t>
+            </a:r>
+            <a:endParaRPr lang="en-US" sz="850" dirty="0"/>
+          </a:p>
+        </p:txBody>
+      </p:sp>
+      <p:sp>
+        <p:nvSpPr>
+          <p:cNvPr id="28" name="Shape 26"/>
+          <p:cNvSpPr/>
+          <p:nvPr/>
+        </p:nvSpPr>
+        <p:spPr>
+          <a:xfrm>
             <a:off x="365760" y="3273552"/>
             <a:ext cx="1371600" cy="658368"/>
           </a:xfrm>
@@ -25730,7 +25908,7 @@
       </p:sp>
       <p:sp>
         <p:nvSpPr>
-          <p:cNvPr id="26" name="Text 24"/>
+          <p:cNvPr id="29" name="Text 27"/>
           <p:cNvSpPr/>
           <p:nvPr/>
         </p:nvSpPr>
@@ -25769,7 +25947,7 @@
       </p:sp>
       <p:sp>
         <p:nvSpPr>
-          <p:cNvPr id="27" name="Shape 25"/>
+          <p:cNvPr id="30" name="Shape 28"/>
           <p:cNvSpPr/>
           <p:nvPr/>
         </p:nvSpPr>
@@ -25796,7 +25974,7 @@
       </p:sp>
       <p:sp>
         <p:nvSpPr>
-          <p:cNvPr id="28" name="Text 26"/>
+          <p:cNvPr id="31" name="Text 29"/>
           <p:cNvSpPr/>
           <p:nvPr/>
         </p:nvSpPr>
@@ -25835,7 +26013,7 @@
       </p:sp>
       <p:sp>
         <p:nvSpPr>
-          <p:cNvPr id="29" name="Shape 27"/>
+          <p:cNvPr id="32" name="Shape 30"/>
           <p:cNvSpPr/>
           <p:nvPr/>
         </p:nvSpPr>
@@ -25862,7 +26040,7 @@
       </p:sp>
       <p:sp>
         <p:nvSpPr>
-          <p:cNvPr id="30" name="Text 28"/>
+          <p:cNvPr id="33" name="Text 31"/>
           <p:cNvSpPr/>
           <p:nvPr/>
         </p:nvSpPr>
@@ -25901,7 +26079,7 @@
       </p:sp>
       <p:sp>
         <p:nvSpPr>
-          <p:cNvPr id="31" name="Shape 29"/>
+          <p:cNvPr id="34" name="Shape 32"/>
           <p:cNvSpPr/>
           <p:nvPr/>
         </p:nvSpPr>
@@ -25928,7 +26106,7 @@
       </p:sp>
       <p:sp>
         <p:nvSpPr>
-          <p:cNvPr id="32" name="Text 30"/>
+          <p:cNvPr id="35" name="Text 33"/>
           <p:cNvSpPr/>
           <p:nvPr/>
         </p:nvSpPr>
@@ -26251,7 +26429,7 @@
                 <a:ea typeface="Calibri" pitchFamily="34" charset="-122"/>
                 <a:cs typeface="Calibri" pitchFamily="34" charset="-120"/>
               </a:rPr>
-              <a:t>Word Labs  •  wordlabs.app  •  Root: 'predict' = to say before it happens</a:t>
+              <a:t>Word Labs  •  wordlabs.app  •  Root: 'predict' = say what will happen</a:t>
             </a:r>
             <a:endParaRPr lang="en-US" sz="800" dirty="0"/>
           </a:p>
@@ -26324,7 +26502,7 @@
                 <a:ea typeface="Trebuchet MS" pitchFamily="34" charset="-122"/>
                 <a:cs typeface="Trebuchet MS" pitchFamily="34" charset="-120"/>
               </a:rPr>
-              <a:t>We are learning that the root 'predict' means 'to say before it happens'.</a:t>
+              <a:t>We are learning that the root 'predict' means 'say what will happen'.</a:t>
             </a:r>
             <a:endParaRPr lang="en-US" sz="2000" dirty="0"/>
           </a:p>
@@ -26970,7 +27148,7 @@
                 <a:ea typeface="Calibri" pitchFamily="34" charset="-122"/>
                 <a:cs typeface="Calibri" pitchFamily="34" charset="-120"/>
               </a:rPr>
-              <a:t>Word Labs  •  wordlabs.app  •  Root: 'predict' = to say before it happens</a:t>
+              <a:t>Word Labs  •  wordlabs.app  •  Root: 'predict' = say what will happen</a:t>
             </a:r>
             <a:endParaRPr lang="en-US" sz="800" dirty="0"/>
           </a:p>
@@ -27109,7 +27287,7 @@
                 <a:ea typeface="Trebuchet MS" pitchFamily="34" charset="-122"/>
                 <a:cs typeface="Trebuchet MS" pitchFamily="34" charset="-120"/>
               </a:rPr>
-              <a:t>unpredictable</a:t>
+              <a:t>unpredictably</a:t>
             </a:r>
             <a:endParaRPr lang="en-US" sz="2800" dirty="0"/>
           </a:p>
@@ -27189,8 +27367,8 @@
         </p:nvSpPr>
         <p:spPr>
           <a:xfrm>
-            <a:off x="2221992" y="2258568"/>
-            <a:ext cx="1828800" cy="292608"/>
+            <a:off x="1989734" y="2258568"/>
+            <a:ext cx="1581912" cy="292608"/>
           </a:xfrm>
           <a:prstGeom prst="rect">
             <a:avLst>
@@ -27223,8 +27401,8 @@
         </p:nvSpPr>
         <p:spPr>
           <a:xfrm>
-            <a:off x="2221992" y="2258568"/>
-            <a:ext cx="1828800" cy="292608"/>
+            <a:off x="1989734" y="2258568"/>
+            <a:ext cx="1581912" cy="292608"/>
           </a:xfrm>
           <a:prstGeom prst="rect">
             <a:avLst/>
@@ -27262,8 +27440,8 @@
         </p:nvSpPr>
         <p:spPr>
           <a:xfrm>
-            <a:off x="2221992" y="2569464"/>
-            <a:ext cx="1828800" cy="201168"/>
+            <a:off x="1989734" y="2569464"/>
+            <a:ext cx="1581912" cy="201168"/>
           </a:xfrm>
           <a:prstGeom prst="rect">
             <a:avLst/>
@@ -27301,8 +27479,8 @@
         </p:nvSpPr>
         <p:spPr>
           <a:xfrm>
-            <a:off x="4370832" y="2258568"/>
-            <a:ext cx="1828800" cy="292608"/>
+            <a:off x="3659429" y="2258568"/>
+            <a:ext cx="1581912" cy="292608"/>
           </a:xfrm>
           <a:prstGeom prst="rect">
             <a:avLst>
@@ -27335,8 +27513,8 @@
         </p:nvSpPr>
         <p:spPr>
           <a:xfrm>
-            <a:off x="4370832" y="2258568"/>
-            <a:ext cx="1828800" cy="292608"/>
+            <a:off x="3659429" y="2258568"/>
+            <a:ext cx="1581912" cy="292608"/>
           </a:xfrm>
           <a:prstGeom prst="rect">
             <a:avLst/>
@@ -27374,8 +27552,8 @@
         </p:nvSpPr>
         <p:spPr>
           <a:xfrm>
-            <a:off x="4370832" y="2569464"/>
-            <a:ext cx="1828800" cy="201168"/>
+            <a:off x="3659429" y="2569464"/>
+            <a:ext cx="1581912" cy="201168"/>
           </a:xfrm>
           <a:prstGeom prst="rect">
             <a:avLst/>
@@ -27399,7 +27577,7 @@
                 <a:ea typeface="Calibri" pitchFamily="34" charset="-122"/>
                 <a:cs typeface="Calibri" pitchFamily="34" charset="-120"/>
               </a:rPr>
-              <a:t>to say before it happens</a:t>
+              <a:t>say what will happen</a:t>
             </a:r>
             <a:endParaRPr lang="en-US" sz="850" dirty="0"/>
           </a:p>
@@ -27413,8 +27591,8 @@
         </p:nvSpPr>
         <p:spPr>
           <a:xfrm>
-            <a:off x="6519672" y="2258568"/>
-            <a:ext cx="1828800" cy="292608"/>
+            <a:off x="5329123" y="2258568"/>
+            <a:ext cx="1581912" cy="292608"/>
           </a:xfrm>
           <a:prstGeom prst="rect">
             <a:avLst>
@@ -27447,8 +27625,8 @@
         </p:nvSpPr>
         <p:spPr>
           <a:xfrm>
-            <a:off x="6519672" y="2258568"/>
-            <a:ext cx="1828800" cy="292608"/>
+            <a:off x="5329123" y="2258568"/>
+            <a:ext cx="1581912" cy="292608"/>
           </a:xfrm>
           <a:prstGeom prst="rect">
             <a:avLst/>
@@ -27486,8 +27664,8 @@
         </p:nvSpPr>
         <p:spPr>
           <a:xfrm>
-            <a:off x="6519672" y="2569464"/>
-            <a:ext cx="1828800" cy="201168"/>
+            <a:off x="5329123" y="2569464"/>
+            <a:ext cx="1581912" cy="201168"/>
           </a:xfrm>
           <a:prstGeom prst="rect">
             <a:avLst/>
@@ -27525,6 +27703,118 @@
         </p:nvSpPr>
         <p:spPr>
           <a:xfrm>
+            <a:off x="6998818" y="2258568"/>
+            <a:ext cx="1581912" cy="292608"/>
+          </a:xfrm>
+          <a:prstGeom prst="rect">
+            <a:avLst>
+              <a:gd name="adj" fmla="val 25000"/>
+            </a:avLst>
+          </a:prstGeom>
+          <a:solidFill>
+            <a:srgbClr val="FCE7F3"/>
+          </a:solidFill>
+          <a:ln w="19050">
+            <a:solidFill>
+              <a:srgbClr val="DB2777"/>
+            </a:solidFill>
+            <a:prstDash val="solid"/>
+          </a:ln>
+          <a:effectLst>
+            <a:outerShdw sx="100000" sy="100000" kx="0" ky="0" algn="bl" rotWithShape="0" blurRad="101600" dist="38100" dir="8100000">
+              <a:srgbClr val="000000">
+                <a:alpha val="12000"/>
+              </a:srgbClr>
+            </a:outerShdw>
+          </a:effectLst>
+        </p:spPr>
+      </p:sp>
+      <p:sp>
+        <p:nvSpPr>
+          <p:cNvPr id="26" name="Text 24"/>
+          <p:cNvSpPr/>
+          <p:nvPr/>
+        </p:nvSpPr>
+        <p:spPr>
+          <a:xfrm>
+            <a:off x="6998818" y="2258568"/>
+            <a:ext cx="1581912" cy="292608"/>
+          </a:xfrm>
+          <a:prstGeom prst="rect">
+            <a:avLst/>
+          </a:prstGeom>
+          <a:noFill/>
+          <a:ln/>
+        </p:spPr>
+        <p:txBody>
+          <a:bodyPr wrap="square" lIns="0" tIns="0" rIns="0" bIns="0" rtlCol="0" anchor="ctr"/>
+          <a:lstStyle/>
+          <a:p>
+            <a:pPr algn="ctr" indent="0" marL="0">
+              <a:buNone/>
+            </a:pPr>
+            <a:r>
+              <a:rPr lang="en-US" sz="1300" b="1" dirty="0">
+                <a:solidFill>
+                  <a:srgbClr val="9D174D"/>
+                </a:solidFill>
+                <a:latin typeface="Trebuchet MS" pitchFamily="34" charset="0"/>
+                <a:ea typeface="Trebuchet MS" pitchFamily="34" charset="-122"/>
+                <a:cs typeface="Trebuchet MS" pitchFamily="34" charset="-120"/>
+              </a:rPr>
+              <a:t>ly</a:t>
+            </a:r>
+            <a:endParaRPr lang="en-US" sz="1300" dirty="0"/>
+          </a:p>
+        </p:txBody>
+      </p:sp>
+      <p:sp>
+        <p:nvSpPr>
+          <p:cNvPr id="27" name="Text 25"/>
+          <p:cNvSpPr/>
+          <p:nvPr/>
+        </p:nvSpPr>
+        <p:spPr>
+          <a:xfrm>
+            <a:off x="6998818" y="2569464"/>
+            <a:ext cx="1581912" cy="201168"/>
+          </a:xfrm>
+          <a:prstGeom prst="rect">
+            <a:avLst/>
+          </a:prstGeom>
+          <a:noFill/>
+          <a:ln/>
+        </p:spPr>
+        <p:txBody>
+          <a:bodyPr wrap="square" lIns="0" tIns="0" rIns="0" bIns="0" rtlCol="0" anchor="t"/>
+          <a:lstStyle/>
+          <a:p>
+            <a:pPr algn="ctr" indent="0" marL="0">
+              <a:buNone/>
+            </a:pPr>
+            <a:r>
+              <a:rPr lang="en-US" sz="850" dirty="0">
+                <a:solidFill>
+                  <a:srgbClr val="475569"/>
+                </a:solidFill>
+                <a:latin typeface="Calibri" pitchFamily="34" charset="0"/>
+                <a:ea typeface="Calibri" pitchFamily="34" charset="-122"/>
+                <a:cs typeface="Calibri" pitchFamily="34" charset="-120"/>
+              </a:rPr>
+              <a:t>in a certain way</a:t>
+            </a:r>
+            <a:endParaRPr lang="en-US" sz="850" dirty="0"/>
+          </a:p>
+        </p:txBody>
+      </p:sp>
+      <p:sp>
+        <p:nvSpPr>
+          <p:cNvPr id="28" name="Shape 26"/>
+          <p:cNvSpPr/>
+          <p:nvPr/>
+        </p:nvSpPr>
+        <p:spPr>
+          <a:xfrm>
             <a:off x="365760" y="3273552"/>
             <a:ext cx="1371600" cy="658368"/>
           </a:xfrm>
@@ -27546,7 +27836,7 @@
       </p:sp>
       <p:sp>
         <p:nvSpPr>
-          <p:cNvPr id="26" name="Text 24"/>
+          <p:cNvPr id="29" name="Text 27"/>
           <p:cNvSpPr/>
           <p:nvPr/>
         </p:nvSpPr>
@@ -27585,7 +27875,7 @@
       </p:sp>
       <p:sp>
         <p:nvSpPr>
-          <p:cNvPr id="27" name="Shape 25"/>
+          <p:cNvPr id="30" name="Shape 28"/>
           <p:cNvSpPr/>
           <p:nvPr/>
         </p:nvSpPr>
@@ -27612,7 +27902,7 @@
       </p:sp>
       <p:sp>
         <p:nvSpPr>
-          <p:cNvPr id="28" name="Shape 26"/>
+          <p:cNvPr id="31" name="Shape 29"/>
           <p:cNvSpPr/>
           <p:nvPr/>
         </p:nvSpPr>
@@ -27639,7 +27929,7 @@
       </p:sp>
       <p:sp>
         <p:nvSpPr>
-          <p:cNvPr id="29" name="Text 27"/>
+          <p:cNvPr id="32" name="Text 30"/>
           <p:cNvSpPr/>
           <p:nvPr/>
         </p:nvSpPr>
@@ -27678,7 +27968,7 @@
       </p:sp>
       <p:sp>
         <p:nvSpPr>
-          <p:cNvPr id="30" name="Text 28"/>
+          <p:cNvPr id="33" name="Text 31"/>
           <p:cNvSpPr/>
           <p:nvPr/>
         </p:nvSpPr>
@@ -27717,7 +28007,7 @@
       </p:sp>
       <p:sp>
         <p:nvSpPr>
-          <p:cNvPr id="31" name="Shape 29"/>
+          <p:cNvPr id="34" name="Shape 32"/>
           <p:cNvSpPr/>
           <p:nvPr/>
         </p:nvSpPr>
@@ -27744,7 +28034,7 @@
       </p:sp>
       <p:sp>
         <p:nvSpPr>
-          <p:cNvPr id="32" name="Text 30"/>
+          <p:cNvPr id="35" name="Text 33"/>
           <p:cNvSpPr/>
           <p:nvPr/>
         </p:nvSpPr>
@@ -27783,7 +28073,7 @@
       </p:sp>
       <p:sp>
         <p:nvSpPr>
-          <p:cNvPr id="33" name="Text 31"/>
+          <p:cNvPr id="36" name="Text 34"/>
           <p:cNvSpPr/>
           <p:nvPr/>
         </p:nvSpPr>
@@ -27822,7 +28112,7 @@
       </p:sp>
       <p:sp>
         <p:nvSpPr>
-          <p:cNvPr id="34" name="Shape 32"/>
+          <p:cNvPr id="37" name="Shape 35"/>
           <p:cNvSpPr/>
           <p:nvPr/>
         </p:nvSpPr>
@@ -27849,7 +28139,7 @@
       </p:sp>
       <p:sp>
         <p:nvSpPr>
-          <p:cNvPr id="35" name="Text 33"/>
+          <p:cNvPr id="38" name="Text 36"/>
           <p:cNvSpPr/>
           <p:nvPr/>
         </p:nvSpPr>
@@ -27888,7 +28178,7 @@
       </p:sp>
       <p:sp>
         <p:nvSpPr>
-          <p:cNvPr id="36" name="Text 34"/>
+          <p:cNvPr id="39" name="Text 37"/>
           <p:cNvSpPr/>
           <p:nvPr/>
         </p:nvSpPr>
@@ -27927,7 +28217,7 @@
       </p:sp>
       <p:sp>
         <p:nvSpPr>
-          <p:cNvPr id="37" name="Shape 35"/>
+          <p:cNvPr id="40" name="Shape 38"/>
           <p:cNvSpPr/>
           <p:nvPr/>
         </p:nvSpPr>
@@ -27954,7 +28244,7 @@
       </p:sp>
       <p:sp>
         <p:nvSpPr>
-          <p:cNvPr id="38" name="Text 36"/>
+          <p:cNvPr id="41" name="Text 39"/>
           <p:cNvSpPr/>
           <p:nvPr/>
         </p:nvSpPr>
@@ -27993,7 +28283,7 @@
       </p:sp>
       <p:sp>
         <p:nvSpPr>
-          <p:cNvPr id="39" name="Text 37"/>
+          <p:cNvPr id="42" name="Text 40"/>
           <p:cNvSpPr/>
           <p:nvPr/>
         </p:nvSpPr>
@@ -28032,7 +28322,7 @@
       </p:sp>
       <p:sp>
         <p:nvSpPr>
-          <p:cNvPr id="40" name="Shape 38"/>
+          <p:cNvPr id="43" name="Shape 41"/>
           <p:cNvSpPr/>
           <p:nvPr/>
         </p:nvSpPr>
@@ -28059,7 +28349,7 @@
       </p:sp>
       <p:sp>
         <p:nvSpPr>
-          <p:cNvPr id="41" name="Text 39"/>
+          <p:cNvPr id="44" name="Text 42"/>
           <p:cNvSpPr/>
           <p:nvPr/>
         </p:nvSpPr>
@@ -28090,7 +28380,7 @@
                 <a:ea typeface="Trebuchet MS" pitchFamily="34" charset="-122"/>
                 <a:cs typeface="Trebuchet MS" pitchFamily="34" charset="-120"/>
               </a:rPr>
-              <a:t>ble</a:t>
+              <a:t>bly</a:t>
             </a:r>
             <a:endParaRPr lang="en-US" sz="1400" dirty="0"/>
           </a:p>
@@ -28098,7 +28388,7 @@
       </p:sp>
       <p:sp>
         <p:nvSpPr>
-          <p:cNvPr id="42" name="Shape 40"/>
+          <p:cNvPr id="45" name="Shape 43"/>
           <p:cNvSpPr/>
           <p:nvPr/>
         </p:nvSpPr>
@@ -28125,7 +28415,7 @@
       </p:sp>
       <p:sp>
         <p:nvSpPr>
-          <p:cNvPr id="43" name="Text 41"/>
+          <p:cNvPr id="46" name="Text 44"/>
           <p:cNvSpPr/>
           <p:nvPr/>
         </p:nvSpPr>
@@ -28164,7 +28454,7 @@
       </p:sp>
       <p:sp>
         <p:nvSpPr>
-          <p:cNvPr id="44" name="Shape 42"/>
+          <p:cNvPr id="47" name="Shape 45"/>
           <p:cNvSpPr/>
           <p:nvPr/>
         </p:nvSpPr>
@@ -28191,7 +28481,7 @@
       </p:sp>
       <p:sp>
         <p:nvSpPr>
-          <p:cNvPr id="45" name="Text 43"/>
+          <p:cNvPr id="48" name="Text 46"/>
           <p:cNvSpPr/>
           <p:nvPr/>
         </p:nvSpPr>
@@ -28514,7 +28804,7 @@
                 <a:ea typeface="Calibri" pitchFamily="34" charset="-122"/>
                 <a:cs typeface="Calibri" pitchFamily="34" charset="-120"/>
               </a:rPr>
-              <a:t>Word Labs  •  wordlabs.app  •  Root: 'predict' = to say before it happens</a:t>
+              <a:t>Word Labs  •  wordlabs.app  •  Root: 'predict' = say what will happen</a:t>
             </a:r>
             <a:endParaRPr lang="en-US" sz="800" dirty="0"/>
           </a:p>
@@ -28653,7 +28943,7 @@
                 <a:ea typeface="Trebuchet MS" pitchFamily="34" charset="-122"/>
                 <a:cs typeface="Trebuchet MS" pitchFamily="34" charset="-120"/>
               </a:rPr>
-              <a:t>unpredictable</a:t>
+              <a:t>unpredictably</a:t>
             </a:r>
             <a:endParaRPr lang="en-US" sz="2800" dirty="0"/>
           </a:p>
@@ -28733,8 +29023,8 @@
         </p:nvSpPr>
         <p:spPr>
           <a:xfrm>
-            <a:off x="2221992" y="2258568"/>
-            <a:ext cx="1828800" cy="292608"/>
+            <a:off x="1989734" y="2258568"/>
+            <a:ext cx="1581912" cy="292608"/>
           </a:xfrm>
           <a:prstGeom prst="rect">
             <a:avLst>
@@ -28767,8 +29057,8 @@
         </p:nvSpPr>
         <p:spPr>
           <a:xfrm>
-            <a:off x="2221992" y="2258568"/>
-            <a:ext cx="1828800" cy="292608"/>
+            <a:off x="1989734" y="2258568"/>
+            <a:ext cx="1581912" cy="292608"/>
           </a:xfrm>
           <a:prstGeom prst="rect">
             <a:avLst/>
@@ -28806,8 +29096,8 @@
         </p:nvSpPr>
         <p:spPr>
           <a:xfrm>
-            <a:off x="2221992" y="2569464"/>
-            <a:ext cx="1828800" cy="201168"/>
+            <a:off x="1989734" y="2569464"/>
+            <a:ext cx="1581912" cy="201168"/>
           </a:xfrm>
           <a:prstGeom prst="rect">
             <a:avLst/>
@@ -28845,8 +29135,8 @@
         </p:nvSpPr>
         <p:spPr>
           <a:xfrm>
-            <a:off x="4370832" y="2258568"/>
-            <a:ext cx="1828800" cy="292608"/>
+            <a:off x="3659429" y="2258568"/>
+            <a:ext cx="1581912" cy="292608"/>
           </a:xfrm>
           <a:prstGeom prst="rect">
             <a:avLst>
@@ -28879,8 +29169,8 @@
         </p:nvSpPr>
         <p:spPr>
           <a:xfrm>
-            <a:off x="4370832" y="2258568"/>
-            <a:ext cx="1828800" cy="292608"/>
+            <a:off x="3659429" y="2258568"/>
+            <a:ext cx="1581912" cy="292608"/>
           </a:xfrm>
           <a:prstGeom prst="rect">
             <a:avLst/>
@@ -28918,8 +29208,8 @@
         </p:nvSpPr>
         <p:spPr>
           <a:xfrm>
-            <a:off x="4370832" y="2569464"/>
-            <a:ext cx="1828800" cy="201168"/>
+            <a:off x="3659429" y="2569464"/>
+            <a:ext cx="1581912" cy="201168"/>
           </a:xfrm>
           <a:prstGeom prst="rect">
             <a:avLst/>
@@ -28943,7 +29233,7 @@
                 <a:ea typeface="Calibri" pitchFamily="34" charset="-122"/>
                 <a:cs typeface="Calibri" pitchFamily="34" charset="-120"/>
               </a:rPr>
-              <a:t>to say before it happens</a:t>
+              <a:t>say what will happen</a:t>
             </a:r>
             <a:endParaRPr lang="en-US" sz="850" dirty="0"/>
           </a:p>
@@ -28957,8 +29247,8 @@
         </p:nvSpPr>
         <p:spPr>
           <a:xfrm>
-            <a:off x="6519672" y="2258568"/>
-            <a:ext cx="1828800" cy="292608"/>
+            <a:off x="5329123" y="2258568"/>
+            <a:ext cx="1581912" cy="292608"/>
           </a:xfrm>
           <a:prstGeom prst="rect">
             <a:avLst>
@@ -28991,8 +29281,8 @@
         </p:nvSpPr>
         <p:spPr>
           <a:xfrm>
-            <a:off x="6519672" y="2258568"/>
-            <a:ext cx="1828800" cy="292608"/>
+            <a:off x="5329123" y="2258568"/>
+            <a:ext cx="1581912" cy="292608"/>
           </a:xfrm>
           <a:prstGeom prst="rect">
             <a:avLst/>
@@ -29030,8 +29320,8 @@
         </p:nvSpPr>
         <p:spPr>
           <a:xfrm>
-            <a:off x="6519672" y="2569464"/>
-            <a:ext cx="1828800" cy="201168"/>
+            <a:off x="5329123" y="2569464"/>
+            <a:ext cx="1581912" cy="201168"/>
           </a:xfrm>
           <a:prstGeom prst="rect">
             <a:avLst/>
@@ -29069,6 +29359,118 @@
         </p:nvSpPr>
         <p:spPr>
           <a:xfrm>
+            <a:off x="6998818" y="2258568"/>
+            <a:ext cx="1581912" cy="292608"/>
+          </a:xfrm>
+          <a:prstGeom prst="rect">
+            <a:avLst>
+              <a:gd name="adj" fmla="val 25000"/>
+            </a:avLst>
+          </a:prstGeom>
+          <a:solidFill>
+            <a:srgbClr val="FCE7F3"/>
+          </a:solidFill>
+          <a:ln w="19050">
+            <a:solidFill>
+              <a:srgbClr val="DB2777"/>
+            </a:solidFill>
+            <a:prstDash val="solid"/>
+          </a:ln>
+          <a:effectLst>
+            <a:outerShdw sx="100000" sy="100000" kx="0" ky="0" algn="bl" rotWithShape="0" blurRad="101600" dist="38100" dir="8100000">
+              <a:srgbClr val="000000">
+                <a:alpha val="12000"/>
+              </a:srgbClr>
+            </a:outerShdw>
+          </a:effectLst>
+        </p:spPr>
+      </p:sp>
+      <p:sp>
+        <p:nvSpPr>
+          <p:cNvPr id="26" name="Text 24"/>
+          <p:cNvSpPr/>
+          <p:nvPr/>
+        </p:nvSpPr>
+        <p:spPr>
+          <a:xfrm>
+            <a:off x="6998818" y="2258568"/>
+            <a:ext cx="1581912" cy="292608"/>
+          </a:xfrm>
+          <a:prstGeom prst="rect">
+            <a:avLst/>
+          </a:prstGeom>
+          <a:noFill/>
+          <a:ln/>
+        </p:spPr>
+        <p:txBody>
+          <a:bodyPr wrap="square" lIns="0" tIns="0" rIns="0" bIns="0" rtlCol="0" anchor="ctr"/>
+          <a:lstStyle/>
+          <a:p>
+            <a:pPr algn="ctr" indent="0" marL="0">
+              <a:buNone/>
+            </a:pPr>
+            <a:r>
+              <a:rPr lang="en-US" sz="1300" b="1" dirty="0">
+                <a:solidFill>
+                  <a:srgbClr val="9D174D"/>
+                </a:solidFill>
+                <a:latin typeface="Trebuchet MS" pitchFamily="34" charset="0"/>
+                <a:ea typeface="Trebuchet MS" pitchFamily="34" charset="-122"/>
+                <a:cs typeface="Trebuchet MS" pitchFamily="34" charset="-120"/>
+              </a:rPr>
+              <a:t>ly</a:t>
+            </a:r>
+            <a:endParaRPr lang="en-US" sz="1300" dirty="0"/>
+          </a:p>
+        </p:txBody>
+      </p:sp>
+      <p:sp>
+        <p:nvSpPr>
+          <p:cNvPr id="27" name="Text 25"/>
+          <p:cNvSpPr/>
+          <p:nvPr/>
+        </p:nvSpPr>
+        <p:spPr>
+          <a:xfrm>
+            <a:off x="6998818" y="2569464"/>
+            <a:ext cx="1581912" cy="201168"/>
+          </a:xfrm>
+          <a:prstGeom prst="rect">
+            <a:avLst/>
+          </a:prstGeom>
+          <a:noFill/>
+          <a:ln/>
+        </p:spPr>
+        <p:txBody>
+          <a:bodyPr wrap="square" lIns="0" tIns="0" rIns="0" bIns="0" rtlCol="0" anchor="t"/>
+          <a:lstStyle/>
+          <a:p>
+            <a:pPr algn="ctr" indent="0" marL="0">
+              <a:buNone/>
+            </a:pPr>
+            <a:r>
+              <a:rPr lang="en-US" sz="850" dirty="0">
+                <a:solidFill>
+                  <a:srgbClr val="475569"/>
+                </a:solidFill>
+                <a:latin typeface="Calibri" pitchFamily="34" charset="0"/>
+                <a:ea typeface="Calibri" pitchFamily="34" charset="-122"/>
+                <a:cs typeface="Calibri" pitchFamily="34" charset="-120"/>
+              </a:rPr>
+              <a:t>in a certain way</a:t>
+            </a:r>
+            <a:endParaRPr lang="en-US" sz="850" dirty="0"/>
+          </a:p>
+        </p:txBody>
+      </p:sp>
+      <p:sp>
+        <p:nvSpPr>
+          <p:cNvPr id="28" name="Shape 26"/>
+          <p:cNvSpPr/>
+          <p:nvPr/>
+        </p:nvSpPr>
+        <p:spPr>
+          <a:xfrm>
             <a:off x="365760" y="3273552"/>
             <a:ext cx="1371600" cy="658368"/>
           </a:xfrm>
@@ -29090,7 +29492,7 @@
       </p:sp>
       <p:sp>
         <p:nvSpPr>
-          <p:cNvPr id="26" name="Text 24"/>
+          <p:cNvPr id="29" name="Text 27"/>
           <p:cNvSpPr/>
           <p:nvPr/>
         </p:nvSpPr>
@@ -29129,7 +29531,7 @@
       </p:sp>
       <p:sp>
         <p:nvSpPr>
-          <p:cNvPr id="27" name="Shape 25"/>
+          <p:cNvPr id="30" name="Shape 28"/>
           <p:cNvSpPr/>
           <p:nvPr/>
         </p:nvSpPr>
@@ -29156,7 +29558,7 @@
       </p:sp>
       <p:sp>
         <p:nvSpPr>
-          <p:cNvPr id="28" name="Shape 26"/>
+          <p:cNvPr id="31" name="Shape 29"/>
           <p:cNvSpPr/>
           <p:nvPr/>
         </p:nvSpPr>
@@ -29183,7 +29585,7 @@
       </p:sp>
       <p:sp>
         <p:nvSpPr>
-          <p:cNvPr id="29" name="Text 27"/>
+          <p:cNvPr id="32" name="Text 30"/>
           <p:cNvSpPr/>
           <p:nvPr/>
         </p:nvSpPr>
@@ -29222,7 +29624,7 @@
       </p:sp>
       <p:sp>
         <p:nvSpPr>
-          <p:cNvPr id="30" name="Text 28"/>
+          <p:cNvPr id="33" name="Text 31"/>
           <p:cNvSpPr/>
           <p:nvPr/>
         </p:nvSpPr>
@@ -29261,7 +29663,7 @@
       </p:sp>
       <p:sp>
         <p:nvSpPr>
-          <p:cNvPr id="31" name="Shape 29"/>
+          <p:cNvPr id="34" name="Shape 32"/>
           <p:cNvSpPr/>
           <p:nvPr/>
         </p:nvSpPr>
@@ -29288,7 +29690,7 @@
       </p:sp>
       <p:sp>
         <p:nvSpPr>
-          <p:cNvPr id="32" name="Text 30"/>
+          <p:cNvPr id="35" name="Text 33"/>
           <p:cNvSpPr/>
           <p:nvPr/>
         </p:nvSpPr>
@@ -29327,7 +29729,7 @@
       </p:sp>
       <p:sp>
         <p:nvSpPr>
-          <p:cNvPr id="33" name="Text 31"/>
+          <p:cNvPr id="36" name="Text 34"/>
           <p:cNvSpPr/>
           <p:nvPr/>
         </p:nvSpPr>
@@ -29366,7 +29768,7 @@
       </p:sp>
       <p:sp>
         <p:nvSpPr>
-          <p:cNvPr id="34" name="Shape 32"/>
+          <p:cNvPr id="37" name="Shape 35"/>
           <p:cNvSpPr/>
           <p:nvPr/>
         </p:nvSpPr>
@@ -29393,7 +29795,7 @@
       </p:sp>
       <p:sp>
         <p:nvSpPr>
-          <p:cNvPr id="35" name="Text 33"/>
+          <p:cNvPr id="38" name="Text 36"/>
           <p:cNvSpPr/>
           <p:nvPr/>
         </p:nvSpPr>
@@ -29432,7 +29834,7 @@
       </p:sp>
       <p:sp>
         <p:nvSpPr>
-          <p:cNvPr id="36" name="Text 34"/>
+          <p:cNvPr id="39" name="Text 37"/>
           <p:cNvSpPr/>
           <p:nvPr/>
         </p:nvSpPr>
@@ -29471,7 +29873,7 @@
       </p:sp>
       <p:sp>
         <p:nvSpPr>
-          <p:cNvPr id="37" name="Shape 35"/>
+          <p:cNvPr id="40" name="Shape 38"/>
           <p:cNvSpPr/>
           <p:nvPr/>
         </p:nvSpPr>
@@ -29498,7 +29900,7 @@
       </p:sp>
       <p:sp>
         <p:nvSpPr>
-          <p:cNvPr id="38" name="Text 36"/>
+          <p:cNvPr id="41" name="Text 39"/>
           <p:cNvSpPr/>
           <p:nvPr/>
         </p:nvSpPr>
@@ -29537,7 +29939,7 @@
       </p:sp>
       <p:sp>
         <p:nvSpPr>
-          <p:cNvPr id="39" name="Text 37"/>
+          <p:cNvPr id="42" name="Text 40"/>
           <p:cNvSpPr/>
           <p:nvPr/>
         </p:nvSpPr>
@@ -29576,7 +29978,7 @@
       </p:sp>
       <p:sp>
         <p:nvSpPr>
-          <p:cNvPr id="40" name="Shape 38"/>
+          <p:cNvPr id="43" name="Shape 41"/>
           <p:cNvSpPr/>
           <p:nvPr/>
         </p:nvSpPr>
@@ -29603,7 +30005,7 @@
       </p:sp>
       <p:sp>
         <p:nvSpPr>
-          <p:cNvPr id="41" name="Text 39"/>
+          <p:cNvPr id="44" name="Text 42"/>
           <p:cNvSpPr/>
           <p:nvPr/>
         </p:nvSpPr>
@@ -29634,7 +30036,7 @@
                 <a:ea typeface="Trebuchet MS" pitchFamily="34" charset="-122"/>
                 <a:cs typeface="Trebuchet MS" pitchFamily="34" charset="-120"/>
               </a:rPr>
-              <a:t>ble</a:t>
+              <a:t>bly</a:t>
             </a:r>
             <a:endParaRPr lang="en-US" sz="1400" dirty="0"/>
           </a:p>
@@ -29642,7 +30044,7 @@
       </p:sp>
       <p:sp>
         <p:nvSpPr>
-          <p:cNvPr id="42" name="Shape 40"/>
+          <p:cNvPr id="45" name="Shape 43"/>
           <p:cNvSpPr/>
           <p:nvPr/>
         </p:nvSpPr>
@@ -29669,7 +30071,7 @@
       </p:sp>
       <p:sp>
         <p:nvSpPr>
-          <p:cNvPr id="43" name="Text 41"/>
+          <p:cNvPr id="46" name="Text 44"/>
           <p:cNvSpPr/>
           <p:nvPr/>
         </p:nvSpPr>
@@ -29708,7 +30110,7 @@
       </p:sp>
       <p:sp>
         <p:nvSpPr>
-          <p:cNvPr id="44" name="Shape 42"/>
+          <p:cNvPr id="47" name="Shape 45"/>
           <p:cNvSpPr/>
           <p:nvPr/>
         </p:nvSpPr>
@@ -29735,14 +30137,14 @@
       </p:sp>
       <p:sp>
         <p:nvSpPr>
-          <p:cNvPr id="45" name="Shape 43"/>
-          <p:cNvSpPr/>
-          <p:nvPr/>
-        </p:nvSpPr>
-        <p:spPr>
-          <a:xfrm>
-            <a:off x="1952596" y="4169664"/>
-            <a:ext cx="493776" cy="384048"/>
+          <p:cNvPr id="48" name="Shape 46"/>
+          <p:cNvSpPr/>
+          <p:nvPr/>
+        </p:nvSpPr>
+        <p:spPr>
+          <a:xfrm>
+            <a:off x="1952897" y="4169664"/>
+            <a:ext cx="451573" cy="384048"/>
           </a:xfrm>
           <a:prstGeom prst="rect">
             <a:avLst>
@@ -29762,14 +30164,14 @@
       </p:sp>
       <p:sp>
         <p:nvSpPr>
-          <p:cNvPr id="46" name="Text 44"/>
-          <p:cNvSpPr/>
-          <p:nvPr/>
-        </p:nvSpPr>
-        <p:spPr>
-          <a:xfrm>
-            <a:off x="1952596" y="4169664"/>
-            <a:ext cx="493776" cy="384048"/>
+          <p:cNvPr id="49" name="Text 47"/>
+          <p:cNvSpPr/>
+          <p:nvPr/>
+        </p:nvSpPr>
+        <p:spPr>
+          <a:xfrm>
+            <a:off x="1952897" y="4169664"/>
+            <a:ext cx="451573" cy="384048"/>
           </a:xfrm>
           <a:prstGeom prst="rect">
             <a:avLst/>
@@ -29801,14 +30203,14 @@
       </p:sp>
       <p:sp>
         <p:nvSpPr>
-          <p:cNvPr id="47" name="Shape 45"/>
-          <p:cNvSpPr/>
-          <p:nvPr/>
-        </p:nvSpPr>
-        <p:spPr>
-          <a:xfrm>
-            <a:off x="2497015" y="4169664"/>
-            <a:ext cx="493776" cy="384048"/>
+          <p:cNvPr id="50" name="Shape 48"/>
+          <p:cNvSpPr/>
+          <p:nvPr/>
+        </p:nvSpPr>
+        <p:spPr>
+          <a:xfrm>
+            <a:off x="2455415" y="4169664"/>
+            <a:ext cx="451573" cy="384048"/>
           </a:xfrm>
           <a:prstGeom prst="rect">
             <a:avLst>
@@ -29828,14 +30230,14 @@
       </p:sp>
       <p:sp>
         <p:nvSpPr>
-          <p:cNvPr id="48" name="Text 46"/>
-          <p:cNvSpPr/>
-          <p:nvPr/>
-        </p:nvSpPr>
-        <p:spPr>
-          <a:xfrm>
-            <a:off x="2497015" y="4169664"/>
-            <a:ext cx="493776" cy="384048"/>
+          <p:cNvPr id="51" name="Text 49"/>
+          <p:cNvSpPr/>
+          <p:nvPr/>
+        </p:nvSpPr>
+        <p:spPr>
+          <a:xfrm>
+            <a:off x="2455415" y="4169664"/>
+            <a:ext cx="451573" cy="384048"/>
           </a:xfrm>
           <a:prstGeom prst="rect">
             <a:avLst/>
@@ -29867,14 +30269,14 @@
       </p:sp>
       <p:sp>
         <p:nvSpPr>
-          <p:cNvPr id="49" name="Shape 47"/>
-          <p:cNvSpPr/>
-          <p:nvPr/>
-        </p:nvSpPr>
-        <p:spPr>
-          <a:xfrm>
-            <a:off x="3041435" y="4169664"/>
-            <a:ext cx="493776" cy="384048"/>
+          <p:cNvPr id="52" name="Shape 50"/>
+          <p:cNvSpPr/>
+          <p:nvPr/>
+        </p:nvSpPr>
+        <p:spPr>
+          <a:xfrm>
+            <a:off x="2957933" y="4169664"/>
+            <a:ext cx="451573" cy="384048"/>
           </a:xfrm>
           <a:prstGeom prst="rect">
             <a:avLst>
@@ -29894,14 +30296,14 @@
       </p:sp>
       <p:sp>
         <p:nvSpPr>
-          <p:cNvPr id="50" name="Text 48"/>
-          <p:cNvSpPr/>
-          <p:nvPr/>
-        </p:nvSpPr>
-        <p:spPr>
-          <a:xfrm>
-            <a:off x="3041435" y="4169664"/>
-            <a:ext cx="493776" cy="384048"/>
+          <p:cNvPr id="53" name="Text 51"/>
+          <p:cNvSpPr/>
+          <p:nvPr/>
+        </p:nvSpPr>
+        <p:spPr>
+          <a:xfrm>
+            <a:off x="2957933" y="4169664"/>
+            <a:ext cx="451573" cy="384048"/>
           </a:xfrm>
           <a:prstGeom prst="rect">
             <a:avLst/>
@@ -29933,14 +30335,14 @@
       </p:sp>
       <p:sp>
         <p:nvSpPr>
-          <p:cNvPr id="51" name="Shape 49"/>
-          <p:cNvSpPr/>
-          <p:nvPr/>
-        </p:nvSpPr>
-        <p:spPr>
-          <a:xfrm>
-            <a:off x="3585855" y="4169664"/>
-            <a:ext cx="493776" cy="384048"/>
+          <p:cNvPr id="54" name="Shape 52"/>
+          <p:cNvSpPr/>
+          <p:nvPr/>
+        </p:nvSpPr>
+        <p:spPr>
+          <a:xfrm>
+            <a:off x="3460451" y="4169664"/>
+            <a:ext cx="451573" cy="384048"/>
           </a:xfrm>
           <a:prstGeom prst="rect">
             <a:avLst>
@@ -29960,14 +30362,14 @@
       </p:sp>
       <p:sp>
         <p:nvSpPr>
-          <p:cNvPr id="52" name="Text 50"/>
-          <p:cNvSpPr/>
-          <p:nvPr/>
-        </p:nvSpPr>
-        <p:spPr>
-          <a:xfrm>
-            <a:off x="3585855" y="4169664"/>
-            <a:ext cx="493776" cy="384048"/>
+          <p:cNvPr id="55" name="Text 53"/>
+          <p:cNvSpPr/>
+          <p:nvPr/>
+        </p:nvSpPr>
+        <p:spPr>
+          <a:xfrm>
+            <a:off x="3460451" y="4169664"/>
+            <a:ext cx="451573" cy="384048"/>
           </a:xfrm>
           <a:prstGeom prst="rect">
             <a:avLst/>
@@ -29999,14 +30401,14 @@
       </p:sp>
       <p:sp>
         <p:nvSpPr>
-          <p:cNvPr id="53" name="Shape 51"/>
-          <p:cNvSpPr/>
-          <p:nvPr/>
-        </p:nvSpPr>
-        <p:spPr>
-          <a:xfrm>
-            <a:off x="4130274" y="4169664"/>
-            <a:ext cx="493776" cy="384048"/>
+          <p:cNvPr id="56" name="Shape 54"/>
+          <p:cNvSpPr/>
+          <p:nvPr/>
+        </p:nvSpPr>
+        <p:spPr>
+          <a:xfrm>
+            <a:off x="3962969" y="4169664"/>
+            <a:ext cx="451573" cy="384048"/>
           </a:xfrm>
           <a:prstGeom prst="rect">
             <a:avLst>
@@ -30026,14 +30428,14 @@
       </p:sp>
       <p:sp>
         <p:nvSpPr>
-          <p:cNvPr id="54" name="Text 52"/>
-          <p:cNvSpPr/>
-          <p:nvPr/>
-        </p:nvSpPr>
-        <p:spPr>
-          <a:xfrm>
-            <a:off x="4130274" y="4169664"/>
-            <a:ext cx="493776" cy="384048"/>
+          <p:cNvPr id="57" name="Text 55"/>
+          <p:cNvSpPr/>
+          <p:nvPr/>
+        </p:nvSpPr>
+        <p:spPr>
+          <a:xfrm>
+            <a:off x="3962969" y="4169664"/>
+            <a:ext cx="451573" cy="384048"/>
           </a:xfrm>
           <a:prstGeom prst="rect">
             <a:avLst/>
@@ -30065,14 +30467,14 @@
       </p:sp>
       <p:sp>
         <p:nvSpPr>
-          <p:cNvPr id="55" name="Shape 53"/>
-          <p:cNvSpPr/>
-          <p:nvPr/>
-        </p:nvSpPr>
-        <p:spPr>
-          <a:xfrm>
-            <a:off x="4674694" y="4169664"/>
-            <a:ext cx="493776" cy="384048"/>
+          <p:cNvPr id="58" name="Shape 56"/>
+          <p:cNvSpPr/>
+          <p:nvPr/>
+        </p:nvSpPr>
+        <p:spPr>
+          <a:xfrm>
+            <a:off x="4465487" y="4169664"/>
+            <a:ext cx="451573" cy="384048"/>
           </a:xfrm>
           <a:prstGeom prst="rect">
             <a:avLst>
@@ -30092,14 +30494,14 @@
       </p:sp>
       <p:sp>
         <p:nvSpPr>
-          <p:cNvPr id="56" name="Text 54"/>
-          <p:cNvSpPr/>
-          <p:nvPr/>
-        </p:nvSpPr>
-        <p:spPr>
-          <a:xfrm>
-            <a:off x="4674694" y="4169664"/>
-            <a:ext cx="493776" cy="384048"/>
+          <p:cNvPr id="59" name="Text 57"/>
+          <p:cNvSpPr/>
+          <p:nvPr/>
+        </p:nvSpPr>
+        <p:spPr>
+          <a:xfrm>
+            <a:off x="4465487" y="4169664"/>
+            <a:ext cx="451573" cy="384048"/>
           </a:xfrm>
           <a:prstGeom prst="rect">
             <a:avLst/>
@@ -30131,14 +30533,14 @@
       </p:sp>
       <p:sp>
         <p:nvSpPr>
-          <p:cNvPr id="57" name="Shape 55"/>
-          <p:cNvSpPr/>
-          <p:nvPr/>
-        </p:nvSpPr>
-        <p:spPr>
-          <a:xfrm>
-            <a:off x="5219114" y="4169664"/>
-            <a:ext cx="493776" cy="384048"/>
+          <p:cNvPr id="60" name="Shape 58"/>
+          <p:cNvSpPr/>
+          <p:nvPr/>
+        </p:nvSpPr>
+        <p:spPr>
+          <a:xfrm>
+            <a:off x="4968006" y="4169664"/>
+            <a:ext cx="451573" cy="384048"/>
           </a:xfrm>
           <a:prstGeom prst="rect">
             <a:avLst>
@@ -30158,14 +30560,14 @@
       </p:sp>
       <p:sp>
         <p:nvSpPr>
-          <p:cNvPr id="58" name="Text 56"/>
-          <p:cNvSpPr/>
-          <p:nvPr/>
-        </p:nvSpPr>
-        <p:spPr>
-          <a:xfrm>
-            <a:off x="5219114" y="4169664"/>
-            <a:ext cx="493776" cy="384048"/>
+          <p:cNvPr id="61" name="Text 59"/>
+          <p:cNvSpPr/>
+          <p:nvPr/>
+        </p:nvSpPr>
+        <p:spPr>
+          <a:xfrm>
+            <a:off x="4968006" y="4169664"/>
+            <a:ext cx="451573" cy="384048"/>
           </a:xfrm>
           <a:prstGeom prst="rect">
             <a:avLst/>
@@ -30197,14 +30599,14 @@
       </p:sp>
       <p:sp>
         <p:nvSpPr>
-          <p:cNvPr id="59" name="Shape 57"/>
-          <p:cNvSpPr/>
-          <p:nvPr/>
-        </p:nvSpPr>
-        <p:spPr>
-          <a:xfrm>
-            <a:off x="5763534" y="4169664"/>
-            <a:ext cx="493776" cy="384048"/>
+          <p:cNvPr id="62" name="Shape 60"/>
+          <p:cNvSpPr/>
+          <p:nvPr/>
+        </p:nvSpPr>
+        <p:spPr>
+          <a:xfrm>
+            <a:off x="5470524" y="4169664"/>
+            <a:ext cx="451573" cy="384048"/>
           </a:xfrm>
           <a:prstGeom prst="rect">
             <a:avLst>
@@ -30224,14 +30626,14 @@
       </p:sp>
       <p:sp>
         <p:nvSpPr>
-          <p:cNvPr id="60" name="Text 58"/>
-          <p:cNvSpPr/>
-          <p:nvPr/>
-        </p:nvSpPr>
-        <p:spPr>
-          <a:xfrm>
-            <a:off x="5763534" y="4169664"/>
-            <a:ext cx="493776" cy="384048"/>
+          <p:cNvPr id="63" name="Text 61"/>
+          <p:cNvSpPr/>
+          <p:nvPr/>
+        </p:nvSpPr>
+        <p:spPr>
+          <a:xfrm>
+            <a:off x="5470524" y="4169664"/>
+            <a:ext cx="451573" cy="384048"/>
           </a:xfrm>
           <a:prstGeom prst="rect">
             <a:avLst/>
@@ -30263,14 +30665,14 @@
       </p:sp>
       <p:sp>
         <p:nvSpPr>
-          <p:cNvPr id="61" name="Text 59"/>
-          <p:cNvSpPr/>
-          <p:nvPr/>
-        </p:nvSpPr>
-        <p:spPr>
-          <a:xfrm>
-            <a:off x="5763534" y="4572000"/>
-            <a:ext cx="493776" cy="219456"/>
+          <p:cNvPr id="64" name="Text 62"/>
+          <p:cNvSpPr/>
+          <p:nvPr/>
+        </p:nvSpPr>
+        <p:spPr>
+          <a:xfrm>
+            <a:off x="5470524" y="4572000"/>
+            <a:ext cx="451573" cy="219456"/>
           </a:xfrm>
           <a:prstGeom prst="rect">
             <a:avLst/>
@@ -30302,14 +30704,14 @@
       </p:sp>
       <p:sp>
         <p:nvSpPr>
-          <p:cNvPr id="62" name="Shape 60"/>
-          <p:cNvSpPr/>
-          <p:nvPr/>
-        </p:nvSpPr>
-        <p:spPr>
-          <a:xfrm>
-            <a:off x="6307953" y="4169664"/>
-            <a:ext cx="493776" cy="384048"/>
+          <p:cNvPr id="65" name="Shape 63"/>
+          <p:cNvSpPr/>
+          <p:nvPr/>
+        </p:nvSpPr>
+        <p:spPr>
+          <a:xfrm>
+            <a:off x="5973042" y="4169664"/>
+            <a:ext cx="451573" cy="384048"/>
           </a:xfrm>
           <a:prstGeom prst="rect">
             <a:avLst>
@@ -30329,14 +30731,14 @@
       </p:sp>
       <p:sp>
         <p:nvSpPr>
-          <p:cNvPr id="63" name="Text 61"/>
-          <p:cNvSpPr/>
-          <p:nvPr/>
-        </p:nvSpPr>
-        <p:spPr>
-          <a:xfrm>
-            <a:off x="6307953" y="4169664"/>
-            <a:ext cx="493776" cy="384048"/>
+          <p:cNvPr id="66" name="Text 64"/>
+          <p:cNvSpPr/>
+          <p:nvPr/>
+        </p:nvSpPr>
+        <p:spPr>
+          <a:xfrm>
+            <a:off x="5973042" y="4169664"/>
+            <a:ext cx="451573" cy="384048"/>
           </a:xfrm>
           <a:prstGeom prst="rect">
             <a:avLst/>
@@ -30368,14 +30770,14 @@
       </p:sp>
       <p:sp>
         <p:nvSpPr>
-          <p:cNvPr id="64" name="Shape 62"/>
-          <p:cNvSpPr/>
-          <p:nvPr/>
-        </p:nvSpPr>
-        <p:spPr>
-          <a:xfrm>
-            <a:off x="6852373" y="4169664"/>
-            <a:ext cx="493776" cy="384048"/>
+          <p:cNvPr id="67" name="Shape 65"/>
+          <p:cNvSpPr/>
+          <p:nvPr/>
+        </p:nvSpPr>
+        <p:spPr>
+          <a:xfrm>
+            <a:off x="6475560" y="4169664"/>
+            <a:ext cx="451573" cy="384048"/>
           </a:xfrm>
           <a:prstGeom prst="rect">
             <a:avLst>
@@ -30395,14 +30797,14 @@
       </p:sp>
       <p:sp>
         <p:nvSpPr>
-          <p:cNvPr id="65" name="Text 63"/>
-          <p:cNvSpPr/>
-          <p:nvPr/>
-        </p:nvSpPr>
-        <p:spPr>
-          <a:xfrm>
-            <a:off x="6852373" y="4169664"/>
-            <a:ext cx="493776" cy="384048"/>
+          <p:cNvPr id="68" name="Text 66"/>
+          <p:cNvSpPr/>
+          <p:nvPr/>
+        </p:nvSpPr>
+        <p:spPr>
+          <a:xfrm>
+            <a:off x="6475560" y="4169664"/>
+            <a:ext cx="451573" cy="384048"/>
           </a:xfrm>
           <a:prstGeom prst="rect">
             <a:avLst/>
@@ -30434,14 +30836,14 @@
       </p:sp>
       <p:sp>
         <p:nvSpPr>
-          <p:cNvPr id="66" name="Shape 64"/>
-          <p:cNvSpPr/>
-          <p:nvPr/>
-        </p:nvSpPr>
-        <p:spPr>
-          <a:xfrm>
-            <a:off x="7396793" y="4169664"/>
-            <a:ext cx="493776" cy="384048"/>
+          <p:cNvPr id="69" name="Shape 67"/>
+          <p:cNvSpPr/>
+          <p:nvPr/>
+        </p:nvSpPr>
+        <p:spPr>
+          <a:xfrm>
+            <a:off x="6978078" y="4169664"/>
+            <a:ext cx="451573" cy="384048"/>
           </a:xfrm>
           <a:prstGeom prst="rect">
             <a:avLst>
@@ -30461,14 +30863,14 @@
       </p:sp>
       <p:sp>
         <p:nvSpPr>
-          <p:cNvPr id="67" name="Text 65"/>
-          <p:cNvSpPr/>
-          <p:nvPr/>
-        </p:nvSpPr>
-        <p:spPr>
-          <a:xfrm>
-            <a:off x="7396793" y="4169664"/>
-            <a:ext cx="493776" cy="384048"/>
+          <p:cNvPr id="70" name="Text 68"/>
+          <p:cNvSpPr/>
+          <p:nvPr/>
+        </p:nvSpPr>
+        <p:spPr>
+          <a:xfrm>
+            <a:off x="6978078" y="4169664"/>
+            <a:ext cx="451573" cy="384048"/>
           </a:xfrm>
           <a:prstGeom prst="rect">
             <a:avLst/>
@@ -30500,14 +30902,14 @@
       </p:sp>
       <p:sp>
         <p:nvSpPr>
-          <p:cNvPr id="68" name="Shape 66"/>
-          <p:cNvSpPr/>
-          <p:nvPr/>
-        </p:nvSpPr>
-        <p:spPr>
-          <a:xfrm>
-            <a:off x="7941212" y="4169664"/>
-            <a:ext cx="493776" cy="384048"/>
+          <p:cNvPr id="71" name="Shape 69"/>
+          <p:cNvSpPr/>
+          <p:nvPr/>
+        </p:nvSpPr>
+        <p:spPr>
+          <a:xfrm>
+            <a:off x="7480596" y="4169664"/>
+            <a:ext cx="451573" cy="384048"/>
           </a:xfrm>
           <a:prstGeom prst="rect">
             <a:avLst>
@@ -30527,14 +30929,14 @@
       </p:sp>
       <p:sp>
         <p:nvSpPr>
-          <p:cNvPr id="69" name="Text 67"/>
-          <p:cNvSpPr/>
-          <p:nvPr/>
-        </p:nvSpPr>
-        <p:spPr>
-          <a:xfrm>
-            <a:off x="7941212" y="4169664"/>
-            <a:ext cx="493776" cy="384048"/>
+          <p:cNvPr id="72" name="Text 70"/>
+          <p:cNvSpPr/>
+          <p:nvPr/>
+        </p:nvSpPr>
+        <p:spPr>
+          <a:xfrm>
+            <a:off x="7480596" y="4169664"/>
+            <a:ext cx="451573" cy="384048"/>
           </a:xfrm>
           <a:prstGeom prst="rect">
             <a:avLst/>
@@ -30558,7 +30960,73 @@
                 <a:ea typeface="Trebuchet MS" pitchFamily="34" charset="-122"/>
                 <a:cs typeface="Trebuchet MS" pitchFamily="34" charset="-120"/>
               </a:rPr>
-              <a:t>le</a:t>
+              <a:t>l</a:t>
+            </a:r>
+            <a:endParaRPr lang="en-US" sz="900" dirty="0"/>
+          </a:p>
+        </p:txBody>
+      </p:sp>
+      <p:sp>
+        <p:nvSpPr>
+          <p:cNvPr id="73" name="Shape 71"/>
+          <p:cNvSpPr/>
+          <p:nvPr/>
+        </p:nvSpPr>
+        <p:spPr>
+          <a:xfrm>
+            <a:off x="7983114" y="4169664"/>
+            <a:ext cx="451573" cy="384048"/>
+          </a:xfrm>
+          <a:prstGeom prst="rect">
+            <a:avLst>
+              <a:gd name="adj" fmla="val 9524"/>
+            </a:avLst>
+          </a:prstGeom>
+          <a:solidFill>
+            <a:srgbClr val="FFFFFF"/>
+          </a:solidFill>
+          <a:ln w="12700">
+            <a:solidFill>
+              <a:srgbClr val="DB2777"/>
+            </a:solidFill>
+            <a:prstDash val="solid"/>
+          </a:ln>
+        </p:spPr>
+      </p:sp>
+      <p:sp>
+        <p:nvSpPr>
+          <p:cNvPr id="74" name="Text 72"/>
+          <p:cNvSpPr/>
+          <p:nvPr/>
+        </p:nvSpPr>
+        <p:spPr>
+          <a:xfrm>
+            <a:off x="7983114" y="4169664"/>
+            <a:ext cx="451573" cy="384048"/>
+          </a:xfrm>
+          <a:prstGeom prst="rect">
+            <a:avLst/>
+          </a:prstGeom>
+          <a:noFill/>
+          <a:ln/>
+        </p:spPr>
+        <p:txBody>
+          <a:bodyPr wrap="square" lIns="0" tIns="0" rIns="0" bIns="0" rtlCol="0" anchor="ctr"/>
+          <a:lstStyle/>
+          <a:p>
+            <a:pPr algn="ctr" indent="0" marL="0">
+              <a:buNone/>
+            </a:pPr>
+            <a:r>
+              <a:rPr lang="en-US" sz="900" b="1" dirty="0">
+                <a:solidFill>
+                  <a:srgbClr val="9D174D"/>
+                </a:solidFill>
+                <a:latin typeface="Trebuchet MS" pitchFamily="34" charset="0"/>
+                <a:ea typeface="Trebuchet MS" pitchFamily="34" charset="-122"/>
+                <a:cs typeface="Trebuchet MS" pitchFamily="34" charset="-120"/>
+              </a:rPr>
+              <a:t>y</a:t>
             </a:r>
             <a:endParaRPr lang="en-US" sz="900" dirty="0"/>
           </a:p>
@@ -30850,7 +31318,7 @@
                 <a:ea typeface="Calibri" pitchFamily="34" charset="-122"/>
                 <a:cs typeface="Calibri" pitchFamily="34" charset="-120"/>
               </a:rPr>
-              <a:t>Word Labs  •  wordlabs.app  •  Root: 'predict' = to say before it happens</a:t>
+              <a:t>Word Labs  •  wordlabs.app  •  Root: 'predict' = say what will happen</a:t>
             </a:r>
             <a:endParaRPr lang="en-US" sz="800" dirty="0"/>
           </a:p>
@@ -30989,7 +31457,7 @@
                 <a:ea typeface="Trebuchet MS" pitchFamily="34" charset="-122"/>
                 <a:cs typeface="Trebuchet MS" pitchFamily="34" charset="-120"/>
               </a:rPr>
-              <a:t>prediction</a:t>
+              <a:t>predictor</a:t>
             </a:r>
             <a:endParaRPr lang="en-US" sz="2800" dirty="0"/>
           </a:p>
@@ -31677,7 +32145,7 @@
                 <a:ea typeface="Calibri" pitchFamily="34" charset="-122"/>
                 <a:cs typeface="Calibri" pitchFamily="34" charset="-120"/>
               </a:rPr>
-              <a:t>Word Labs  •  wordlabs.app  •  Root: 'predict' = to say before it happens</a:t>
+              <a:t>Word Labs  •  wordlabs.app  •  Root: 'predict' = say what will happen</a:t>
             </a:r>
             <a:endParaRPr lang="en-US" sz="800" dirty="0"/>
           </a:p>
@@ -31816,7 +32284,7 @@
                 <a:ea typeface="Trebuchet MS" pitchFamily="34" charset="-122"/>
                 <a:cs typeface="Trebuchet MS" pitchFamily="34" charset="-120"/>
               </a:rPr>
-              <a:t>prediction</a:t>
+              <a:t>predictor</a:t>
             </a:r>
             <a:endParaRPr lang="en-US" sz="2800" dirty="0"/>
           </a:p>
@@ -31994,7 +32462,7 @@
                 <a:ea typeface="Calibri" pitchFamily="34" charset="-122"/>
                 <a:cs typeface="Calibri" pitchFamily="34" charset="-120"/>
               </a:rPr>
-              <a:t>to say before it happens</a:t>
+              <a:t>say what will happen</a:t>
             </a:r>
             <a:endParaRPr lang="en-US" sz="850" dirty="0"/>
           </a:p>
@@ -32067,7 +32535,7 @@
                 <a:ea typeface="Trebuchet MS" pitchFamily="34" charset="-122"/>
                 <a:cs typeface="Trebuchet MS" pitchFamily="34" charset="-120"/>
               </a:rPr>
-              <a:t>ion</a:t>
+              <a:t>or</a:t>
             </a:r>
             <a:endParaRPr lang="en-US" sz="1300" dirty="0"/>
           </a:p>
@@ -32106,7 +32574,7 @@
                 <a:ea typeface="Calibri" pitchFamily="34" charset="-122"/>
                 <a:cs typeface="Calibri" pitchFamily="34" charset="-120"/>
               </a:rPr>
-              <a:t>act or result of</a:t>
+              <a:t>person or thing that does</a:t>
             </a:r>
             <a:endParaRPr lang="en-US" sz="850" dirty="0"/>
           </a:p>
@@ -32662,7 +33130,7 @@
                 <a:ea typeface="Calibri" pitchFamily="34" charset="-122"/>
                 <a:cs typeface="Calibri" pitchFamily="34" charset="-120"/>
               </a:rPr>
-              <a:t>Word Labs  •  wordlabs.app  •  Root: 'predict' = to say before it happens</a:t>
+              <a:t>Word Labs  •  wordlabs.app  •  Root: 'predict' = say what will happen</a:t>
             </a:r>
             <a:endParaRPr lang="en-US" sz="800" dirty="0"/>
           </a:p>
@@ -32801,7 +33269,7 @@
                 <a:ea typeface="Trebuchet MS" pitchFamily="34" charset="-122"/>
                 <a:cs typeface="Trebuchet MS" pitchFamily="34" charset="-120"/>
               </a:rPr>
-              <a:t>prediction</a:t>
+              <a:t>predictor</a:t>
             </a:r>
             <a:endParaRPr lang="en-US" sz="2800" dirty="0"/>
           </a:p>
@@ -32979,7 +33447,7 @@
                 <a:ea typeface="Calibri" pitchFamily="34" charset="-122"/>
                 <a:cs typeface="Calibri" pitchFamily="34" charset="-120"/>
               </a:rPr>
-              <a:t>to say before it happens</a:t>
+              <a:t>say what will happen</a:t>
             </a:r>
             <a:endParaRPr lang="en-US" sz="850" dirty="0"/>
           </a:p>
@@ -33052,7 +33520,7 @@
                 <a:ea typeface="Trebuchet MS" pitchFamily="34" charset="-122"/>
                 <a:cs typeface="Trebuchet MS" pitchFamily="34" charset="-120"/>
               </a:rPr>
-              <a:t>ion</a:t>
+              <a:t>or</a:t>
             </a:r>
             <a:endParaRPr lang="en-US" sz="1300" dirty="0"/>
           </a:p>
@@ -33091,7 +33559,7 @@
                 <a:ea typeface="Calibri" pitchFamily="34" charset="-122"/>
                 <a:cs typeface="Calibri" pitchFamily="34" charset="-120"/>
               </a:rPr>
-              <a:t>act or result of</a:t>
+              <a:t>person or thing that does</a:t>
             </a:r>
             <a:endParaRPr lang="en-US" sz="850" dirty="0"/>
           </a:p>
@@ -33460,7 +33928,7 @@
                 <a:ea typeface="Trebuchet MS" pitchFamily="34" charset="-122"/>
                 <a:cs typeface="Trebuchet MS" pitchFamily="34" charset="-120"/>
               </a:rPr>
-              <a:t>tion</a:t>
+              <a:t>tor</a:t>
             </a:r>
             <a:endParaRPr lang="en-US" sz="1400" dirty="0"/>
           </a:p>
@@ -33884,7 +34352,7 @@
                 <a:ea typeface="Calibri" pitchFamily="34" charset="-122"/>
                 <a:cs typeface="Calibri" pitchFamily="34" charset="-120"/>
               </a:rPr>
-              <a:t>Word Labs  •  wordlabs.app  •  Root: 'predict' = to say before it happens</a:t>
+              <a:t>Word Labs  •  wordlabs.app  •  Root: 'predict' = say what will happen</a:t>
             </a:r>
             <a:endParaRPr lang="en-US" sz="800" dirty="0"/>
           </a:p>
@@ -34023,7 +34491,7 @@
                 <a:ea typeface="Trebuchet MS" pitchFamily="34" charset="-122"/>
                 <a:cs typeface="Trebuchet MS" pitchFamily="34" charset="-120"/>
               </a:rPr>
-              <a:t>prediction</a:t>
+              <a:t>predictor</a:t>
             </a:r>
             <a:endParaRPr lang="en-US" sz="2800" dirty="0"/>
           </a:p>
@@ -34201,7 +34669,7 @@
                 <a:ea typeface="Calibri" pitchFamily="34" charset="-122"/>
                 <a:cs typeface="Calibri" pitchFamily="34" charset="-120"/>
               </a:rPr>
-              <a:t>to say before it happens</a:t>
+              <a:t>say what will happen</a:t>
             </a:r>
             <a:endParaRPr lang="en-US" sz="850" dirty="0"/>
           </a:p>
@@ -34274,7 +34742,7 @@
                 <a:ea typeface="Trebuchet MS" pitchFamily="34" charset="-122"/>
                 <a:cs typeface="Trebuchet MS" pitchFamily="34" charset="-120"/>
               </a:rPr>
-              <a:t>ion</a:t>
+              <a:t>or</a:t>
             </a:r>
             <a:endParaRPr lang="en-US" sz="1300" dirty="0"/>
           </a:p>
@@ -34313,7 +34781,7 @@
                 <a:ea typeface="Calibri" pitchFamily="34" charset="-122"/>
                 <a:cs typeface="Calibri" pitchFamily="34" charset="-120"/>
               </a:rPr>
-              <a:t>act or result of</a:t>
+              <a:t>person or thing that does</a:t>
             </a:r>
             <a:endParaRPr lang="en-US" sz="850" dirty="0"/>
           </a:p>
@@ -34682,7 +35150,7 @@
                 <a:ea typeface="Trebuchet MS" pitchFamily="34" charset="-122"/>
                 <a:cs typeface="Trebuchet MS" pitchFamily="34" charset="-120"/>
               </a:rPr>
-              <a:t>tion</a:t>
+              <a:t>tor</a:t>
             </a:r>
             <a:endParaRPr lang="en-US" sz="1400" dirty="0"/>
           </a:p>
@@ -34789,8 +35257,8 @@
         </p:nvSpPr>
         <p:spPr>
           <a:xfrm>
-            <a:off x="1951330" y="4169664"/>
-            <a:ext cx="676656" cy="384048"/>
+            <a:off x="2023872" y="4169664"/>
+            <a:ext cx="685800" cy="384048"/>
           </a:xfrm>
           <a:prstGeom prst="rect">
             <a:avLst>
@@ -34816,8 +35284,8 @@
         </p:nvSpPr>
         <p:spPr>
           <a:xfrm>
-            <a:off x="1951330" y="4169664"/>
-            <a:ext cx="676656" cy="384048"/>
+            <a:off x="2023872" y="4169664"/>
+            <a:ext cx="685800" cy="384048"/>
           </a:xfrm>
           <a:prstGeom prst="rect">
             <a:avLst/>
@@ -34855,8 +35323,8 @@
         </p:nvSpPr>
         <p:spPr>
           <a:xfrm>
-            <a:off x="2677363" y="4169664"/>
-            <a:ext cx="676656" cy="384048"/>
+            <a:off x="2831592" y="4169664"/>
+            <a:ext cx="685800" cy="384048"/>
           </a:xfrm>
           <a:prstGeom prst="rect">
             <a:avLst>
@@ -34882,8 +35350,8 @@
         </p:nvSpPr>
         <p:spPr>
           <a:xfrm>
-            <a:off x="2677363" y="4169664"/>
-            <a:ext cx="676656" cy="384048"/>
+            <a:off x="2831592" y="4169664"/>
+            <a:ext cx="685800" cy="384048"/>
           </a:xfrm>
           <a:prstGeom prst="rect">
             <a:avLst/>
@@ -34921,8 +35389,8 @@
         </p:nvSpPr>
         <p:spPr>
           <a:xfrm>
-            <a:off x="3403397" y="4169664"/>
-            <a:ext cx="676656" cy="384048"/>
+            <a:off x="3639312" y="4169664"/>
+            <a:ext cx="685800" cy="384048"/>
           </a:xfrm>
           <a:prstGeom prst="rect">
             <a:avLst>
@@ -34948,8 +35416,8 @@
         </p:nvSpPr>
         <p:spPr>
           <a:xfrm>
-            <a:off x="3403397" y="4169664"/>
-            <a:ext cx="676656" cy="384048"/>
+            <a:off x="3639312" y="4169664"/>
+            <a:ext cx="685800" cy="384048"/>
           </a:xfrm>
           <a:prstGeom prst="rect">
             <a:avLst/>
@@ -34987,8 +35455,8 @@
         </p:nvSpPr>
         <p:spPr>
           <a:xfrm>
-            <a:off x="4129430" y="4169664"/>
-            <a:ext cx="676656" cy="384048"/>
+            <a:off x="4447032" y="4169664"/>
+            <a:ext cx="685800" cy="384048"/>
           </a:xfrm>
           <a:prstGeom prst="rect">
             <a:avLst>
@@ -35014,8 +35482,8 @@
         </p:nvSpPr>
         <p:spPr>
           <a:xfrm>
-            <a:off x="4129430" y="4169664"/>
-            <a:ext cx="676656" cy="384048"/>
+            <a:off x="4447032" y="4169664"/>
+            <a:ext cx="685800" cy="384048"/>
           </a:xfrm>
           <a:prstGeom prst="rect">
             <a:avLst/>
@@ -35053,8 +35521,8 @@
         </p:nvSpPr>
         <p:spPr>
           <a:xfrm>
-            <a:off x="4855464" y="4169664"/>
-            <a:ext cx="676656" cy="384048"/>
+            <a:off x="5254752" y="4169664"/>
+            <a:ext cx="685800" cy="384048"/>
           </a:xfrm>
           <a:prstGeom prst="rect">
             <a:avLst>
@@ -35080,8 +35548,8 @@
         </p:nvSpPr>
         <p:spPr>
           <a:xfrm>
-            <a:off x="4855464" y="4169664"/>
-            <a:ext cx="676656" cy="384048"/>
+            <a:off x="5254752" y="4169664"/>
+            <a:ext cx="685800" cy="384048"/>
           </a:xfrm>
           <a:prstGeom prst="rect">
             <a:avLst/>
@@ -35119,8 +35587,8 @@
         </p:nvSpPr>
         <p:spPr>
           <a:xfrm>
-            <a:off x="5581498" y="4169664"/>
-            <a:ext cx="676656" cy="384048"/>
+            <a:off x="6062472" y="4169664"/>
+            <a:ext cx="685800" cy="384048"/>
           </a:xfrm>
           <a:prstGeom prst="rect">
             <a:avLst>
@@ -35146,8 +35614,8 @@
         </p:nvSpPr>
         <p:spPr>
           <a:xfrm>
-            <a:off x="5581498" y="4169664"/>
-            <a:ext cx="676656" cy="384048"/>
+            <a:off x="6062472" y="4169664"/>
+            <a:ext cx="685800" cy="384048"/>
           </a:xfrm>
           <a:prstGeom prst="rect">
             <a:avLst/>
@@ -35185,8 +35653,8 @@
         </p:nvSpPr>
         <p:spPr>
           <a:xfrm>
-            <a:off x="5581498" y="4572000"/>
-            <a:ext cx="676656" cy="219456"/>
+            <a:off x="6062472" y="4572000"/>
+            <a:ext cx="685800" cy="219456"/>
           </a:xfrm>
           <a:prstGeom prst="rect">
             <a:avLst/>
@@ -35224,8 +35692,8 @@
         </p:nvSpPr>
         <p:spPr>
           <a:xfrm>
-            <a:off x="6307531" y="4169664"/>
-            <a:ext cx="676656" cy="384048"/>
+            <a:off x="6870192" y="4169664"/>
+            <a:ext cx="685800" cy="384048"/>
           </a:xfrm>
           <a:prstGeom prst="rect">
             <a:avLst>
@@ -35251,8 +35719,8 @@
         </p:nvSpPr>
         <p:spPr>
           <a:xfrm>
-            <a:off x="6307531" y="4169664"/>
-            <a:ext cx="676656" cy="384048"/>
+            <a:off x="6870192" y="4169664"/>
+            <a:ext cx="685800" cy="384048"/>
           </a:xfrm>
           <a:prstGeom prst="rect">
             <a:avLst/>
@@ -35290,8 +35758,8 @@
         </p:nvSpPr>
         <p:spPr>
           <a:xfrm>
-            <a:off x="7033565" y="4169664"/>
-            <a:ext cx="676656" cy="384048"/>
+            <a:off x="7677912" y="4169664"/>
+            <a:ext cx="685800" cy="384048"/>
           </a:xfrm>
           <a:prstGeom prst="rect">
             <a:avLst>
@@ -35317,8 +35785,8 @@
         </p:nvSpPr>
         <p:spPr>
           <a:xfrm>
-            <a:off x="7033565" y="4169664"/>
-            <a:ext cx="676656" cy="384048"/>
+            <a:off x="7677912" y="4169664"/>
+            <a:ext cx="685800" cy="384048"/>
           </a:xfrm>
           <a:prstGeom prst="rect">
             <a:avLst/>
@@ -35342,112 +35810,7 @@
                 <a:ea typeface="Trebuchet MS" pitchFamily="34" charset="-122"/>
                 <a:cs typeface="Trebuchet MS" pitchFamily="34" charset="-120"/>
               </a:rPr>
-              <a:t>io</a:t>
-            </a:r>
-            <a:endParaRPr lang="en-US" sz="900" dirty="0"/>
-          </a:p>
-        </p:txBody>
-      </p:sp>
-      <p:sp>
-        <p:nvSpPr>
-          <p:cNvPr id="53" name="Text 51"/>
-          <p:cNvSpPr/>
-          <p:nvPr/>
-        </p:nvSpPr>
-        <p:spPr>
-          <a:xfrm>
-            <a:off x="7033565" y="4572000"/>
-            <a:ext cx="676656" cy="219456"/>
-          </a:xfrm>
-          <a:prstGeom prst="rect">
-            <a:avLst/>
-          </a:prstGeom>
-          <a:noFill/>
-          <a:ln/>
-        </p:spPr>
-        <p:txBody>
-          <a:bodyPr wrap="square" lIns="0" tIns="0" rIns="0" bIns="0" rtlCol="0" anchor="t"/>
-          <a:lstStyle/>
-          <a:p>
-            <a:pPr algn="ctr" indent="0" marL="0">
-              <a:buNone/>
-            </a:pPr>
-            <a:r>
-              <a:rPr lang="en-US" sz="750" i="1" dirty="0">
-                <a:solidFill>
-                  <a:srgbClr val="94A3B8"/>
-                </a:solidFill>
-                <a:latin typeface="Calibri" pitchFamily="34" charset="0"/>
-                <a:ea typeface="Calibri" pitchFamily="34" charset="-122"/>
-                <a:cs typeface="Calibri" pitchFamily="34" charset="-120"/>
-              </a:rPr>
-              <a:t>/sh/</a:t>
-            </a:r>
-            <a:endParaRPr lang="en-US" sz="750" dirty="0"/>
-          </a:p>
-        </p:txBody>
-      </p:sp>
-      <p:sp>
-        <p:nvSpPr>
-          <p:cNvPr id="54" name="Shape 52"/>
-          <p:cNvSpPr/>
-          <p:nvPr/>
-        </p:nvSpPr>
-        <p:spPr>
-          <a:xfrm>
-            <a:off x="7759598" y="4169664"/>
-            <a:ext cx="676656" cy="384048"/>
-          </a:xfrm>
-          <a:prstGeom prst="rect">
-            <a:avLst>
-              <a:gd name="adj" fmla="val 9524"/>
-            </a:avLst>
-          </a:prstGeom>
-          <a:solidFill>
-            <a:srgbClr val="FFFFFF"/>
-          </a:solidFill>
-          <a:ln w="12700">
-            <a:solidFill>
-              <a:srgbClr val="DB2777"/>
-            </a:solidFill>
-            <a:prstDash val="solid"/>
-          </a:ln>
-        </p:spPr>
-      </p:sp>
-      <p:sp>
-        <p:nvSpPr>
-          <p:cNvPr id="55" name="Text 53"/>
-          <p:cNvSpPr/>
-          <p:nvPr/>
-        </p:nvSpPr>
-        <p:spPr>
-          <a:xfrm>
-            <a:off x="7759598" y="4169664"/>
-            <a:ext cx="676656" cy="384048"/>
-          </a:xfrm>
-          <a:prstGeom prst="rect">
-            <a:avLst/>
-          </a:prstGeom>
-          <a:noFill/>
-          <a:ln/>
-        </p:spPr>
-        <p:txBody>
-          <a:bodyPr wrap="square" lIns="0" tIns="0" rIns="0" bIns="0" rtlCol="0" anchor="ctr"/>
-          <a:lstStyle/>
-          <a:p>
-            <a:pPr algn="ctr" indent="0" marL="0">
-              <a:buNone/>
-            </a:pPr>
-            <a:r>
-              <a:rPr lang="en-US" sz="900" b="1" dirty="0">
-                <a:solidFill>
-                  <a:srgbClr val="9D174D"/>
-                </a:solidFill>
-                <a:latin typeface="Trebuchet MS" pitchFamily="34" charset="0"/>
-                <a:ea typeface="Trebuchet MS" pitchFamily="34" charset="-122"/>
-                <a:cs typeface="Trebuchet MS" pitchFamily="34" charset="-120"/>
-              </a:rPr>
-              <a:t>n</a:t>
+              <a:t>or</a:t>
             </a:r>
             <a:endParaRPr lang="en-US" sz="900" dirty="0"/>
           </a:p>
@@ -35739,7 +36102,7 @@
                 <a:ea typeface="Calibri" pitchFamily="34" charset="-122"/>
                 <a:cs typeface="Calibri" pitchFamily="34" charset="-120"/>
               </a:rPr>
-              <a:t>Word Labs  •  wordlabs.app  •  Root: 'predict' = to say before it happens</a:t>
+              <a:t>Word Labs  •  wordlabs.app  •  Root: 'predict' = say what will happen</a:t>
             </a:r>
             <a:endParaRPr lang="en-US" sz="800" dirty="0"/>
           </a:p>
@@ -36908,7 +37271,7 @@
                 <a:ea typeface="Calibri" pitchFamily="34" charset="-122"/>
                 <a:cs typeface="Calibri" pitchFamily="34" charset="-120"/>
               </a:rPr>
-              <a:t>Word Labs  •  wordlabs.app  •  Root: 'predict' = to say before it happens</a:t>
+              <a:t>Word Labs  •  wordlabs.app  •  Root: 'predict' = say what will happen</a:t>
             </a:r>
             <a:endParaRPr lang="en-US" sz="800" dirty="0"/>
           </a:p>
@@ -37337,7 +37700,7 @@
                 <a:ea typeface="Trebuchet MS" pitchFamily="34" charset="-122"/>
                 <a:cs typeface="Trebuchet MS" pitchFamily="34" charset="-120"/>
               </a:rPr>
-              <a:t>-ion</a:t>
+              <a:t>--ion</a:t>
             </a:r>
             <a:endParaRPr lang="en-US" sz="1300" dirty="0"/>
           </a:p>
@@ -37490,7 +37853,7 @@
                 <a:ea typeface="Trebuchet MS" pitchFamily="34" charset="-122"/>
                 <a:cs typeface="Trebuchet MS" pitchFamily="34" charset="-120"/>
               </a:rPr>
-              <a:t>-able</a:t>
+              <a:t>--able</a:t>
             </a:r>
             <a:endParaRPr lang="en-US" sz="1300" dirty="0"/>
           </a:p>
@@ -37643,7 +38006,7 @@
                 <a:ea typeface="Trebuchet MS" pitchFamily="34" charset="-122"/>
                 <a:cs typeface="Trebuchet MS" pitchFamily="34" charset="-120"/>
               </a:rPr>
-              <a:t>-or</a:t>
+              <a:t>--or</a:t>
             </a:r>
             <a:endParaRPr lang="en-US" sz="1300" dirty="0"/>
           </a:p>
@@ -37707,7 +38070,7 @@
                 <a:ea typeface="Trebuchet MS" pitchFamily="34" charset="-122"/>
                 <a:cs typeface="Trebuchet MS" pitchFamily="34" charset="-120"/>
               </a:rPr>
-              <a:t>pre-</a:t>
+              <a:t>over-</a:t>
             </a:r>
             <a:endParaRPr lang="en-US" sz="1300" dirty="0"/>
           </a:p>
@@ -37796,7 +38159,7 @@
                 <a:ea typeface="Trebuchet MS" pitchFamily="34" charset="-122"/>
                 <a:cs typeface="Trebuchet MS" pitchFamily="34" charset="-120"/>
               </a:rPr>
-              <a:t>-ive</a:t>
+              <a:t>--ive</a:t>
             </a:r>
             <a:endParaRPr lang="en-US" sz="1300" dirty="0"/>
           </a:p>
@@ -37860,7 +38223,7 @@
                 <a:ea typeface="Trebuchet MS" pitchFamily="34" charset="-122"/>
                 <a:cs typeface="Trebuchet MS" pitchFamily="34" charset="-120"/>
               </a:rPr>
-              <a:t>post-</a:t>
+              <a:t>under-</a:t>
             </a:r>
             <a:endParaRPr lang="en-US" sz="1300" dirty="0"/>
           </a:p>
@@ -37949,7 +38312,7 @@
                 <a:ea typeface="Trebuchet MS" pitchFamily="34" charset="-122"/>
                 <a:cs typeface="Trebuchet MS" pitchFamily="34" charset="-120"/>
               </a:rPr>
-              <a:t>-ed</a:t>
+              <a:t>--ed</a:t>
             </a:r>
             <a:endParaRPr lang="en-US" sz="1300" dirty="0"/>
           </a:p>
@@ -38516,7 +38879,7 @@
                 <a:ea typeface="Trebuchet MS" pitchFamily="34" charset="-122"/>
                 <a:cs typeface="Trebuchet MS" pitchFamily="34" charset="-120"/>
               </a:rPr>
-              <a:t>unpredicted</a:t>
+              <a:t>unpredictably</a:t>
             </a:r>
             <a:endParaRPr lang="en-US" sz="1200" dirty="0"/>
           </a:p>
@@ -38808,7 +39171,7 @@
                 <a:ea typeface="Calibri" pitchFamily="34" charset="-122"/>
                 <a:cs typeface="Calibri" pitchFamily="34" charset="-120"/>
               </a:rPr>
-              <a:t>Word Labs  •  wordlabs.app  •  Root: 'predict' = to say before it happens</a:t>
+              <a:t>Word Labs  •  wordlabs.app  •  Root: 'predict' = say what will happen</a:t>
             </a:r>
             <a:endParaRPr lang="en-US" sz="800" dirty="0"/>
           </a:p>
@@ -38972,7 +39335,7 @@
                 <a:ea typeface="Calibri" pitchFamily="34" charset="-122"/>
                 <a:cs typeface="Calibri" pitchFamily="34" charset="-120"/>
               </a:rPr>
-              <a:t>The core part of a word carrying its basic meaning. For example, 'predict' means 'to say before it happens'.</a:t>
+              <a:t>The core part of a word carrying its basic meaning. For example, 'predict' means 'say what will happen'.</a:t>
             </a:r>
             <a:endParaRPr lang="en-US" sz="1350" dirty="0"/>
           </a:p>
@@ -39592,7 +39955,7 @@
                 <a:ea typeface="Calibri" pitchFamily="34" charset="-122"/>
                 <a:cs typeface="Calibri" pitchFamily="34" charset="-120"/>
               </a:rPr>
-              <a:t>Word Labs  •  wordlabs.app  •  Root: 'predict' = to say before it happens</a:t>
+              <a:t>Word Labs  •  wordlabs.app  •  Root: 'predict' = say what will happen</a:t>
             </a:r>
             <a:endParaRPr lang="en-US" sz="800" dirty="0"/>
           </a:p>
@@ -39704,7 +40067,7 @@
                 <a:ea typeface="Calibri" pitchFamily="34" charset="-122"/>
                 <a:cs typeface="Calibri" pitchFamily="34" charset="-120"/>
               </a:rPr>
-              <a:t>1.  The root 'predict' comes from Latin and means to say before.</a:t>
+              <a:t>1.  The word 'predictable' means something that is impossible to guess.</a:t>
             </a:r>
             <a:endParaRPr lang="en-US" sz="1300" dirty="0"/>
           </a:p>
@@ -39727,11 +40090,11 @@
             </a:avLst>
           </a:prstGeom>
           <a:solidFill>
-            <a:srgbClr val="DCFCE7"/>
-          </a:solidFill>
-          <a:ln w="12700">
-            <a:solidFill>
-              <a:srgbClr val="16A34A"/>
+            <a:srgbClr val="FEE2E2"/>
+          </a:solidFill>
+          <a:ln w="12700">
+            <a:solidFill>
+              <a:srgbClr val="DC2626"/>
             </a:solidFill>
             <a:prstDash val="solid"/>
           </a:ln>
@@ -39764,13 +40127,13 @@
             <a:r>
               <a:rPr lang="en-US" sz="1100" b="1" dirty="0">
                 <a:solidFill>
-                  <a:srgbClr val="16A34A"/>
+                  <a:srgbClr val="DC2626"/>
                 </a:solidFill>
                 <a:latin typeface="Trebuchet MS" pitchFamily="34" charset="0"/>
                 <a:ea typeface="Trebuchet MS" pitchFamily="34" charset="-122"/>
                 <a:cs typeface="Trebuchet MS" pitchFamily="34" charset="-120"/>
               </a:rPr>
-              <a:t>TRUE</a:t>
+              <a:t>FALSE</a:t>
             </a:r>
             <a:endParaRPr lang="en-US" sz="1100" dirty="0"/>
           </a:p>
@@ -39843,7 +40206,7 @@
                 <a:ea typeface="Calibri" pitchFamily="34" charset="-122"/>
                 <a:cs typeface="Calibri" pitchFamily="34" charset="-120"/>
               </a:rPr>
-              <a:t>2.  The word 'predictable' means something that is impossible to guess.</a:t>
+              <a:t>2.  The root 'predict' comes from Latin and means to say what will happen.</a:t>
             </a:r>
             <a:endParaRPr lang="en-US" sz="1300" dirty="0"/>
           </a:p>
@@ -39866,11 +40229,11 @@
             </a:avLst>
           </a:prstGeom>
           <a:solidFill>
-            <a:srgbClr val="FEE2E2"/>
-          </a:solidFill>
-          <a:ln w="12700">
-            <a:solidFill>
-              <a:srgbClr val="DC2626"/>
+            <a:srgbClr val="DCFCE7"/>
+          </a:solidFill>
+          <a:ln w="12700">
+            <a:solidFill>
+              <a:srgbClr val="16A34A"/>
             </a:solidFill>
             <a:prstDash val="solid"/>
           </a:ln>
@@ -39903,13 +40266,13 @@
             <a:r>
               <a:rPr lang="en-US" sz="1100" b="1" dirty="0">
                 <a:solidFill>
-                  <a:srgbClr val="DC2626"/>
+                  <a:srgbClr val="16A34A"/>
                 </a:solidFill>
                 <a:latin typeface="Trebuchet MS" pitchFamily="34" charset="0"/>
                 <a:ea typeface="Trebuchet MS" pitchFamily="34" charset="-122"/>
                 <a:cs typeface="Trebuchet MS" pitchFamily="34" charset="-120"/>
               </a:rPr>
-              <a:t>FALSE</a:t>
+              <a:t>TRUE</a:t>
             </a:r>
             <a:endParaRPr lang="en-US" sz="1100" dirty="0"/>
           </a:p>
@@ -39982,7 +40345,7 @@
                 <a:ea typeface="Calibri" pitchFamily="34" charset="-122"/>
                 <a:cs typeface="Calibri" pitchFamily="34" charset="-120"/>
               </a:rPr>
-              <a:t>3.  Adding the prefix 'un' to 'predictable' creates a word meaning not predictable.</a:t>
+              <a:t>3.  A weather forecaster uses prediction when guessing tomorrow's weather.</a:t>
             </a:r>
             <a:endParaRPr lang="en-US" sz="1300" dirty="0"/>
           </a:p>
@@ -40121,7 +40484,7 @@
                 <a:ea typeface="Calibri" pitchFamily="34" charset="-122"/>
                 <a:cs typeface="Calibri" pitchFamily="34" charset="-120"/>
               </a:rPr>
-              <a:t>4.  A 'predictor' is something that gives clues about what might happen.</a:t>
+              <a:t>4.  The prefix 'un' in 'unpredictable' means not or the opposite of.</a:t>
             </a:r>
             <a:endParaRPr lang="en-US" sz="1300" dirty="0"/>
           </a:p>
@@ -40260,7 +40623,7 @@
                 <a:ea typeface="Calibri" pitchFamily="34" charset="-122"/>
                 <a:cs typeface="Calibri" pitchFamily="34" charset="-120"/>
               </a:rPr>
-              <a:t>5.  The suffix '-ion' in 'prediction' turns the word into an adjective.</a:t>
+              <a:t>5.  The root 'predict' originally comes from the Greek language.</a:t>
             </a:r>
             <a:endParaRPr lang="en-US" sz="1300" dirty="0"/>
           </a:p>
@@ -40618,7 +40981,7 @@
                 <a:ea typeface="Calibri" pitchFamily="34" charset="-122"/>
                 <a:cs typeface="Calibri" pitchFamily="34" charset="-120"/>
               </a:rPr>
-              <a:t>Word Labs  •  wordlabs.app  •  Root: 'predict' = to say before it happens</a:t>
+              <a:t>Word Labs  •  wordlabs.app  •  Root: 'predict' = say what will happen</a:t>
             </a:r>
             <a:endParaRPr lang="en-US" sz="800" dirty="0"/>
           </a:p>
@@ -40755,7 +41118,7 @@
                 <a:ea typeface="Trebuchet MS" pitchFamily="34" charset="-122"/>
                 <a:cs typeface="Trebuchet MS" pitchFamily="34" charset="-120"/>
               </a:rPr>
-              <a:t>to say before it happens</a:t>
+              <a:t>say what will happen</a:t>
             </a:r>
             <a:endParaRPr lang="en-US" sz="2000" dirty="0"/>
           </a:p>
@@ -41587,7 +41950,7 @@
                 <a:ea typeface="Calibri" pitchFamily="34" charset="-122"/>
                 <a:cs typeface="Calibri" pitchFamily="34" charset="-120"/>
               </a:rPr>
-              <a:t>Word Labs  •  wordlabs.app  •  Root: 'predict' = to say before it happens</a:t>
+              <a:t>Word Labs  •  wordlabs.app  •  Root: 'predict' = say what will happen</a:t>
             </a:r>
             <a:endParaRPr lang="en-US" sz="800" dirty="0"/>
           </a:p>
@@ -42016,7 +42379,7 @@
                 <a:ea typeface="Trebuchet MS" pitchFamily="34" charset="-122"/>
                 <a:cs typeface="Trebuchet MS" pitchFamily="34" charset="-120"/>
               </a:rPr>
-              <a:t>-ion</a:t>
+              <a:t>--ion</a:t>
             </a:r>
             <a:endParaRPr lang="en-US" sz="1300" dirty="0"/>
           </a:p>
@@ -42169,7 +42532,7 @@
                 <a:ea typeface="Trebuchet MS" pitchFamily="34" charset="-122"/>
                 <a:cs typeface="Trebuchet MS" pitchFamily="34" charset="-120"/>
               </a:rPr>
-              <a:t>-able</a:t>
+              <a:t>--able</a:t>
             </a:r>
             <a:endParaRPr lang="en-US" sz="1300" dirty="0"/>
           </a:p>
@@ -42322,7 +42685,7 @@
                 <a:ea typeface="Trebuchet MS" pitchFamily="34" charset="-122"/>
                 <a:cs typeface="Trebuchet MS" pitchFamily="34" charset="-120"/>
               </a:rPr>
-              <a:t>-or</a:t>
+              <a:t>--or</a:t>
             </a:r>
             <a:endParaRPr lang="en-US" sz="1300" dirty="0"/>
           </a:p>
@@ -42386,7 +42749,7 @@
                 <a:ea typeface="Trebuchet MS" pitchFamily="34" charset="-122"/>
                 <a:cs typeface="Trebuchet MS" pitchFamily="34" charset="-120"/>
               </a:rPr>
-              <a:t>pre-</a:t>
+              <a:t>over-</a:t>
             </a:r>
             <a:endParaRPr lang="en-US" sz="1300" dirty="0"/>
           </a:p>
@@ -42475,7 +42838,7 @@
                 <a:ea typeface="Trebuchet MS" pitchFamily="34" charset="-122"/>
                 <a:cs typeface="Trebuchet MS" pitchFamily="34" charset="-120"/>
               </a:rPr>
-              <a:t>-ive</a:t>
+              <a:t>--ive</a:t>
             </a:r>
             <a:endParaRPr lang="en-US" sz="1300" dirty="0"/>
           </a:p>
@@ -42539,7 +42902,7 @@
                 <a:ea typeface="Trebuchet MS" pitchFamily="34" charset="-122"/>
                 <a:cs typeface="Trebuchet MS" pitchFamily="34" charset="-120"/>
               </a:rPr>
-              <a:t>post-</a:t>
+              <a:t>under-</a:t>
             </a:r>
             <a:endParaRPr lang="en-US" sz="1300" dirty="0"/>
           </a:p>
@@ -42628,7 +42991,7 @@
                 <a:ea typeface="Trebuchet MS" pitchFamily="34" charset="-122"/>
                 <a:cs typeface="Trebuchet MS" pitchFamily="34" charset="-120"/>
               </a:rPr>
-              <a:t>-ed</a:t>
+              <a:t>--ed</a:t>
             </a:r>
             <a:endParaRPr lang="en-US" sz="1300" dirty="0"/>
           </a:p>
@@ -42906,7 +43269,7 @@
         <p:spPr>
           <a:xfrm>
             <a:off x="4764024" y="4178808"/>
-            <a:ext cx="950976" cy="420624"/>
+            <a:ext cx="1097280" cy="420624"/>
           </a:xfrm>
           <a:prstGeom prst="rect">
             <a:avLst>
@@ -42940,7 +43303,7 @@
         <p:spPr>
           <a:xfrm>
             <a:off x="4764024" y="4178808"/>
-            <a:ext cx="950976" cy="420624"/>
+            <a:ext cx="1097280" cy="420624"/>
           </a:xfrm>
           <a:prstGeom prst="rect">
             <a:avLst/>
@@ -42964,7 +43327,7 @@
                 <a:ea typeface="Trebuchet MS" pitchFamily="34" charset="-122"/>
                 <a:cs typeface="Trebuchet MS" pitchFamily="34" charset="-120"/>
               </a:rPr>
-              <a:t>-ion</a:t>
+              <a:t>--ion</a:t>
             </a:r>
             <a:endParaRPr lang="en-US" sz="1300" dirty="0"/>
           </a:p>
@@ -42978,7 +43341,7 @@
         </p:nvSpPr>
         <p:spPr>
           <a:xfrm>
-            <a:off x="5788152" y="4178808"/>
+            <a:off x="5934456" y="4178808"/>
             <a:ext cx="365760" cy="420624"/>
           </a:xfrm>
           <a:prstGeom prst="rect">
@@ -43017,7 +43380,7 @@
         </p:nvSpPr>
         <p:spPr>
           <a:xfrm>
-            <a:off x="6199632" y="4178808"/>
+            <a:off x="6345936" y="4178808"/>
             <a:ext cx="2194560" cy="420624"/>
           </a:xfrm>
           <a:prstGeom prst="rect">
@@ -43044,7 +43407,7 @@
         </p:nvSpPr>
         <p:spPr>
           <a:xfrm>
-            <a:off x="6199632" y="4178808"/>
+            <a:off x="6345936" y="4178808"/>
             <a:ext cx="2194560" cy="420624"/>
           </a:xfrm>
           <a:prstGeom prst="rect">
@@ -43361,7 +43724,7 @@
                 <a:ea typeface="Calibri" pitchFamily="34" charset="-122"/>
                 <a:cs typeface="Calibri" pitchFamily="34" charset="-120"/>
               </a:rPr>
-              <a:t>Word Labs  •  wordlabs.app  •  Root: 'predict' = to say before it happens</a:t>
+              <a:t>Word Labs  •  wordlabs.app  •  Root: 'predict' = say what will happen</a:t>
             </a:r>
             <a:endParaRPr lang="en-US" sz="800" dirty="0"/>
           </a:p>
@@ -43539,7 +43902,7 @@
                 <a:ea typeface="Calibri" pitchFamily="34" charset="-122"/>
                 <a:cs typeface="Calibri" pitchFamily="34" charset="-120"/>
               </a:rPr>
-              <a:t>Something that is easy to guess before it happens.</a:t>
+              <a:t>Easy to guess what will happen because it follows a pattern.</a:t>
             </a:r>
             <a:endParaRPr lang="en-US" sz="1200" dirty="0"/>
           </a:p>
@@ -43678,7 +44041,7 @@
                 <a:ea typeface="Calibri" pitchFamily="34" charset="-122"/>
                 <a:cs typeface="Calibri" pitchFamily="34" charset="-120"/>
               </a:rPr>
-              <a:t>A person or thing that gives clues about what might happen.</a:t>
+              <a:t>A person or thing that tells you what might happen in the future.</a:t>
             </a:r>
             <a:endParaRPr lang="en-US" sz="1200" dirty="0"/>
           </a:p>
@@ -43956,7 +44319,7 @@
                 <a:ea typeface="Calibri" pitchFamily="34" charset="-122"/>
                 <a:cs typeface="Calibri" pitchFamily="34" charset="-120"/>
               </a:rPr>
-              <a:t>Having the ability to guess or show what will happen next.</a:t>
+              <a:t>Able to give hints or clues about what will happen next.</a:t>
             </a:r>
             <a:endParaRPr lang="en-US" sz="1200" dirty="0"/>
           </a:p>
@@ -44095,7 +44458,7 @@
                 <a:ea typeface="Calibri" pitchFamily="34" charset="-122"/>
                 <a:cs typeface="Calibri" pitchFamily="34" charset="-120"/>
               </a:rPr>
-              <a:t>Something that was already guessed or said before it happened.</a:t>
+              <a:t>Something that was already said would happen before it did.</a:t>
             </a:r>
             <a:endParaRPr lang="en-US" sz="1200" dirty="0"/>
           </a:p>
@@ -44234,7 +44597,7 @@
                 <a:ea typeface="Calibri" pitchFamily="34" charset="-122"/>
                 <a:cs typeface="Calibri" pitchFamily="34" charset="-120"/>
               </a:rPr>
-              <a:t>Something that is impossible to guess or know before it happens.</a:t>
+              <a:t>Something that is hard to guess because it can change suddenly.</a:t>
             </a:r>
             <a:endParaRPr lang="en-US" sz="1200" dirty="0"/>
           </a:p>
@@ -44665,7 +45028,7 @@
                 <a:ea typeface="Calibri" pitchFamily="34" charset="-122"/>
                 <a:cs typeface="Calibri" pitchFamily="34" charset="-120"/>
               </a:rPr>
-              <a:t>Word Labs  •  wordlabs.app  •  Root: 'predict' = to say before it happens</a:t>
+              <a:t>Word Labs  •  wordlabs.app  •  Root: 'predict' = say what will happen</a:t>
             </a:r>
             <a:endParaRPr lang="en-US" sz="800" dirty="0"/>
           </a:p>
@@ -44868,7 +45231,7 @@
                 <a:ea typeface="Calibri" pitchFamily="34" charset="-122"/>
                 <a:cs typeface="Calibri" pitchFamily="34" charset="-120"/>
               </a:rPr>
-              <a:t>The scientist was able to predict that the volcano would erupt within the next few days.</a:t>
+              <a:t>Before we read the next chapter, I want you to make a prediction about what you think will happen to the main character.</a:t>
             </a:r>
             <a:endParaRPr lang="en-US" sz="1500" dirty="0"/>
           </a:p>
@@ -45032,7 +45395,7 @@
                 <a:ea typeface="Calibri" pitchFamily="34" charset="-122"/>
                 <a:cs typeface="Calibri" pitchFamily="34" charset="-120"/>
               </a:rPr>
-              <a:t>My prediction about the weather turned out to be completely correct — it rained all afternoon!</a:t>
+              <a:t>Scientists study patterns in nature so they can predict when a volcano might erupt.</a:t>
             </a:r>
             <a:endParaRPr lang="en-US" sz="1500" dirty="0"/>
           </a:p>
@@ -45196,7 +45559,7 @@
                 <a:ea typeface="Calibri" pitchFamily="34" charset="-122"/>
                 <a:cs typeface="Calibri" pitchFamily="34" charset="-120"/>
               </a:rPr>
-              <a:t>The ending of that movie was so predictable that everyone in the class guessed it straight away.</a:t>
+              <a:t>The weather is so unpredictable at this time of year — it could be sunny or stormy!</a:t>
             </a:r>
             <a:endParaRPr lang="en-US" sz="1500" dirty="0"/>
           </a:p>
